--- a/output_pptx/Before_The_Throne_Of_God_Above.pptx
+++ b/output_pptx/Before_The_Throne_Of_God_Above.pptx
@@ -3119,23 +3119,23 @@
         </p:nvSpPr>
         <p:spPr>
           <a:xfrm>
-            <a:off x="594360" y="1837944"/>
-            <a:ext cx="11002975" cy="685800"/>
-          </a:xfrm>
-          <a:prstGeom prst="rect">
-            <a:avLst/>
-          </a:prstGeom>
-          <a:noFill/>
-        </p:spPr>
-        <p:txBody>
-          <a:bodyPr wrap="square">
-            <a:spAutoFit/>
-          </a:bodyPr>
-          <a:lstStyle/>
-          <a:p>
-            <a:pPr algn="ctr"/>
-            <a:r>
-              <a:rPr sz="4400" b="1" i="0">
+            <a:off x="640080" y="1650492"/>
+            <a:ext cx="10911535" cy="731520"/>
+          </a:xfrm>
+          <a:prstGeom prst="rect">
+            <a:avLst/>
+          </a:prstGeom>
+          <a:noFill/>
+        </p:spPr>
+        <p:txBody>
+          <a:bodyPr wrap="square">
+            <a:spAutoFit/>
+          </a:bodyPr>
+          <a:lstStyle/>
+          <a:p>
+            <a:pPr algn="ctr"/>
+            <a:r>
+              <a:rPr sz="4800" b="1" i="0">
                 <a:solidFill>
                   <a:srgbClr val="FFFFFF"/>
                 </a:solidFill>
@@ -3154,8 +3154,8 @@
         </p:nvSpPr>
         <p:spPr>
           <a:xfrm>
-            <a:off x="594360" y="2560320"/>
-            <a:ext cx="11002975" cy="384048"/>
+            <a:off x="640080" y="2418588"/>
+            <a:ext cx="10911535" cy="365760"/>
           </a:xfrm>
           <a:prstGeom prst="rect">
             <a:avLst/>
@@ -3172,7 +3172,7 @@
             <a:r>
               <a:rPr sz="2400" b="0" i="1">
                 <a:solidFill>
-                  <a:srgbClr val="B4B4B4"/>
+                  <a:srgbClr val="AAAAAA"/>
                 </a:solidFill>
                 <a:latin typeface="Arial"/>
               </a:rPr>
@@ -3189,8 +3189,78 @@
         </p:nvSpPr>
         <p:spPr>
           <a:xfrm>
-            <a:off x="594360" y="2980944"/>
-            <a:ext cx="11002975" cy="347472"/>
+            <a:off x="640080" y="2985516"/>
+            <a:ext cx="10911535" cy="731520"/>
+          </a:xfrm>
+          <a:prstGeom prst="rect">
+            <a:avLst/>
+          </a:prstGeom>
+          <a:noFill/>
+        </p:spPr>
+        <p:txBody>
+          <a:bodyPr wrap="square">
+            <a:spAutoFit/>
+          </a:bodyPr>
+          <a:lstStyle/>
+          <a:p>
+            <a:pPr algn="ctr"/>
+            <a:r>
+              <a:rPr sz="4800" b="1" i="0">
+                <a:solidFill>
+                  <a:srgbClr val="FFFFFF"/>
+                </a:solidFill>
+                <a:latin typeface="Arial"/>
+              </a:rPr>
+              <a:t>とりなしを    に なう愛の だいさいし</a:t>
+            </a:r>
+          </a:p>
+        </p:txBody>
+      </p:sp>
+      <p:sp>
+        <p:nvSpPr>
+          <p:cNvPr id="5" name="TextBox 4"/>
+          <p:cNvSpPr txBox="1"/>
+          <p:nvPr/>
+        </p:nvSpPr>
+        <p:spPr>
+          <a:xfrm>
+            <a:off x="640080" y="3753612"/>
+            <a:ext cx="10911535" cy="365760"/>
+          </a:xfrm>
+          <a:prstGeom prst="rect">
+            <a:avLst/>
+          </a:prstGeom>
+          <a:noFill/>
+        </p:spPr>
+        <p:txBody>
+          <a:bodyPr wrap="square">
+            <a:spAutoFit/>
+          </a:bodyPr>
+          <a:lstStyle/>
+          <a:p>
+            <a:pPr algn="ctr"/>
+            <a:r>
+              <a:rPr sz="2400" b="0" i="1">
+                <a:solidFill>
+                  <a:srgbClr val="AAAAAA"/>
+                </a:solidFill>
+                <a:latin typeface="Arial"/>
+              </a:rPr>
+              <a:t>torinashiwo Ninau aino daisaishi</a:t>
+            </a:r>
+          </a:p>
+        </p:txBody>
+      </p:sp>
+      <p:sp>
+        <p:nvSpPr>
+          <p:cNvPr id="6" name="TextBox 5"/>
+          <p:cNvSpPr txBox="1"/>
+          <p:nvPr/>
+        </p:nvSpPr>
+        <p:spPr>
+          <a:xfrm>
+            <a:off x="640080" y="4530852"/>
+            <a:ext cx="10911535" cy="310896"/>
           </a:xfrm>
           <a:prstGeom prst="rect">
             <a:avLst/>
@@ -3207,81 +3277,11 @@
             <a:r>
               <a:rPr sz="2000" b="0" i="1">
                 <a:solidFill>
-                  <a:srgbClr val="8C8C8C"/>
-                </a:solidFill>
-                <a:latin typeface="Arial"/>
-              </a:rPr>
-              <a:t/>
-            </a:r>
-          </a:p>
-        </p:txBody>
-      </p:sp>
-      <p:sp>
-        <p:nvSpPr>
-          <p:cNvPr id="5" name="TextBox 4"/>
-          <p:cNvSpPr txBox="1"/>
-          <p:nvPr/>
-        </p:nvSpPr>
-        <p:spPr>
-          <a:xfrm>
-            <a:off x="594360" y="3529584"/>
-            <a:ext cx="11002975" cy="685800"/>
-          </a:xfrm>
-          <a:prstGeom prst="rect">
-            <a:avLst/>
-          </a:prstGeom>
-          <a:noFill/>
-        </p:spPr>
-        <p:txBody>
-          <a:bodyPr wrap="square">
-            <a:spAutoFit/>
-          </a:bodyPr>
-          <a:lstStyle/>
-          <a:p>
-            <a:pPr algn="ctr"/>
-            <a:r>
-              <a:rPr sz="4400" b="1" i="0">
-                <a:solidFill>
-                  <a:srgbClr val="FFFFFF"/>
-                </a:solidFill>
-                <a:latin typeface="Arial"/>
-              </a:rPr>
-              <a:t>とりなしを    に なう愛の だいさいし</a:t>
-            </a:r>
-          </a:p>
-        </p:txBody>
-      </p:sp>
-      <p:sp>
-        <p:nvSpPr>
-          <p:cNvPr id="6" name="TextBox 5"/>
-          <p:cNvSpPr txBox="1"/>
-          <p:nvPr/>
-        </p:nvSpPr>
-        <p:spPr>
-          <a:xfrm>
-            <a:off x="594360" y="4251960"/>
-            <a:ext cx="11002975" cy="384048"/>
-          </a:xfrm>
-          <a:prstGeom prst="rect">
-            <a:avLst/>
-          </a:prstGeom>
-          <a:noFill/>
-        </p:spPr>
-        <p:txBody>
-          <a:bodyPr wrap="square">
-            <a:spAutoFit/>
-          </a:bodyPr>
-          <a:lstStyle/>
-          <a:p>
-            <a:pPr algn="ctr"/>
-            <a:r>
-              <a:rPr sz="2400" b="0" i="1">
-                <a:solidFill>
-                  <a:srgbClr val="B4B4B4"/>
-                </a:solidFill>
-                <a:latin typeface="Arial"/>
-              </a:rPr>
-              <a:t>torinashiwo Ninau aino daisaishi</a:t>
+                  <a:srgbClr val="828282"/>
+                </a:solidFill>
+                <a:latin typeface="Arial"/>
+              </a:rPr>
+              <a:t>Diante do Trono de Deus</a:t>
             </a:r>
           </a:p>
         </p:txBody>
@@ -3294,8 +3294,8 @@
         </p:nvSpPr>
         <p:spPr>
           <a:xfrm>
-            <a:off x="594360" y="4672584"/>
-            <a:ext cx="11002975" cy="347472"/>
+            <a:off x="640080" y="4896612"/>
+            <a:ext cx="10911535" cy="310896"/>
           </a:xfrm>
           <a:prstGeom prst="rect">
             <a:avLst/>
@@ -3312,11 +3312,11 @@
             <a:r>
               <a:rPr sz="2000" b="0" i="1">
                 <a:solidFill>
-                  <a:srgbClr val="8C8C8C"/>
-                </a:solidFill>
-                <a:latin typeface="Arial"/>
-              </a:rPr>
-              <a:t/>
+                  <a:srgbClr val="828282"/>
+                </a:solidFill>
+                <a:latin typeface="Arial"/>
+              </a:rPr>
+              <a:t>Diante do trono de Deus acima</a:t>
             </a:r>
           </a:p>
         </p:txBody>
@@ -3355,23 +3355,23 @@
         </p:nvSpPr>
         <p:spPr>
           <a:xfrm>
-            <a:off x="594360" y="2258568"/>
-            <a:ext cx="11002975" cy="685800"/>
-          </a:xfrm>
-          <a:prstGeom prst="rect">
-            <a:avLst/>
-          </a:prstGeom>
-          <a:noFill/>
-        </p:spPr>
-        <p:txBody>
-          <a:bodyPr wrap="square">
-            <a:spAutoFit/>
-          </a:bodyPr>
-          <a:lstStyle/>
-          <a:p>
-            <a:pPr algn="ctr"/>
-            <a:r>
-              <a:rPr sz="4400" b="1" i="0">
+            <a:off x="640080" y="2052828"/>
+            <a:ext cx="10911535" cy="731520"/>
+          </a:xfrm>
+          <a:prstGeom prst="rect">
+            <a:avLst/>
+          </a:prstGeom>
+          <a:noFill/>
+        </p:spPr>
+        <p:txBody>
+          <a:bodyPr wrap="square">
+            <a:spAutoFit/>
+          </a:bodyPr>
+          <a:lstStyle/>
+          <a:p>
+            <a:pPr algn="ctr"/>
+            <a:r>
+              <a:rPr sz="4800" b="1" i="0">
                 <a:solidFill>
                   <a:srgbClr val="FFFFFF"/>
                 </a:solidFill>
@@ -3390,99 +3390,29 @@
         </p:nvSpPr>
         <p:spPr>
           <a:xfrm>
-            <a:off x="594360" y="2980944"/>
-            <a:ext cx="11002975" cy="347472"/>
-          </a:xfrm>
-          <a:prstGeom prst="rect">
-            <a:avLst/>
-          </a:prstGeom>
-          <a:noFill/>
-        </p:spPr>
-        <p:txBody>
-          <a:bodyPr wrap="square">
-            <a:spAutoFit/>
-          </a:bodyPr>
-          <a:lstStyle/>
-          <a:p>
-            <a:pPr algn="ctr"/>
-            <a:r>
-              <a:rPr sz="2200" b="0" i="1">
-                <a:solidFill>
-                  <a:srgbClr val="8C8C8C"/>
-                </a:solidFill>
-                <a:latin typeface="Arial"/>
-              </a:rPr>
-              <a:t/>
-            </a:r>
-          </a:p>
-        </p:txBody>
-      </p:sp>
-      <p:sp>
-        <p:nvSpPr>
-          <p:cNvPr id="4" name="TextBox 3"/>
-          <p:cNvSpPr txBox="1"/>
-          <p:nvPr/>
-        </p:nvSpPr>
-        <p:spPr>
-          <a:xfrm>
-            <a:off x="594360" y="3529584"/>
-            <a:ext cx="11002975" cy="685800"/>
-          </a:xfrm>
-          <a:prstGeom prst="rect">
-            <a:avLst/>
-          </a:prstGeom>
-          <a:noFill/>
-        </p:spPr>
-        <p:txBody>
-          <a:bodyPr wrap="square">
-            <a:spAutoFit/>
-          </a:bodyPr>
-          <a:lstStyle/>
-          <a:p>
-            <a:pPr algn="ctr"/>
-            <a:r>
-              <a:rPr sz="3434" b="1" i="0">
+            <a:off x="640080" y="2985516"/>
+            <a:ext cx="10911535" cy="731520"/>
+          </a:xfrm>
+          <a:prstGeom prst="rect">
+            <a:avLst/>
+          </a:prstGeom>
+          <a:noFill/>
+        </p:spPr>
+        <p:txBody>
+          <a:bodyPr wrap="square">
+            <a:spAutoFit/>
+          </a:bodyPr>
+          <a:lstStyle/>
+          <a:p>
+            <a:pPr algn="ctr"/>
+            <a:r>
+              <a:rPr sz="3700" b="1" i="0">
                 <a:solidFill>
                   <a:srgbClr val="FFFFFF"/>
                 </a:solidFill>
                 <a:latin typeface="Arial"/>
               </a:rPr>
               <a:t>Um grande Sumo Sacerdote cujo nome é Amor</a:t>
-            </a:r>
-          </a:p>
-        </p:txBody>
-      </p:sp>
-      <p:sp>
-        <p:nvSpPr>
-          <p:cNvPr id="5" name="TextBox 4"/>
-          <p:cNvSpPr txBox="1"/>
-          <p:nvPr/>
-        </p:nvSpPr>
-        <p:spPr>
-          <a:xfrm>
-            <a:off x="594360" y="4251960"/>
-            <a:ext cx="11002975" cy="347472"/>
-          </a:xfrm>
-          <a:prstGeom prst="rect">
-            <a:avLst/>
-          </a:prstGeom>
-          <a:noFill/>
-        </p:spPr>
-        <p:txBody>
-          <a:bodyPr wrap="square">
-            <a:spAutoFit/>
-          </a:bodyPr>
-          <a:lstStyle/>
-          <a:p>
-            <a:pPr algn="ctr"/>
-            <a:r>
-              <a:rPr sz="2200" b="0" i="1">
-                <a:solidFill>
-                  <a:srgbClr val="8C8C8C"/>
-                </a:solidFill>
-                <a:latin typeface="Arial"/>
-              </a:rPr>
-              <a:t/>
             </a:r>
           </a:p>
         </p:txBody>
@@ -3521,23 +3451,23 @@
         </p:nvSpPr>
         <p:spPr>
           <a:xfrm>
-            <a:off x="594360" y="2258568"/>
-            <a:ext cx="11002975" cy="685800"/>
-          </a:xfrm>
-          <a:prstGeom prst="rect">
-            <a:avLst/>
-          </a:prstGeom>
-          <a:noFill/>
-        </p:spPr>
-        <p:txBody>
-          <a:bodyPr wrap="square">
-            <a:spAutoFit/>
-          </a:bodyPr>
-          <a:lstStyle/>
-          <a:p>
-            <a:pPr algn="ctr"/>
-            <a:r>
-              <a:rPr sz="4400" b="1" i="0">
+            <a:off x="640080" y="2052828"/>
+            <a:ext cx="10911535" cy="731520"/>
+          </a:xfrm>
+          <a:prstGeom prst="rect">
+            <a:avLst/>
+          </a:prstGeom>
+          <a:noFill/>
+        </p:spPr>
+        <p:txBody>
+          <a:bodyPr wrap="square">
+            <a:spAutoFit/>
+          </a:bodyPr>
+          <a:lstStyle/>
+          <a:p>
+            <a:pPr algn="ctr"/>
+            <a:r>
+              <a:rPr sz="4800" b="1" i="0">
                 <a:solidFill>
                   <a:srgbClr val="FFFFFF"/>
                 </a:solidFill>
@@ -3556,99 +3486,29 @@
         </p:nvSpPr>
         <p:spPr>
           <a:xfrm>
-            <a:off x="594360" y="2980944"/>
-            <a:ext cx="11002975" cy="347472"/>
-          </a:xfrm>
-          <a:prstGeom prst="rect">
-            <a:avLst/>
-          </a:prstGeom>
-          <a:noFill/>
-        </p:spPr>
-        <p:txBody>
-          <a:bodyPr wrap="square">
-            <a:spAutoFit/>
-          </a:bodyPr>
-          <a:lstStyle/>
-          <a:p>
-            <a:pPr algn="ctr"/>
-            <a:r>
-              <a:rPr sz="2200" b="0" i="1">
-                <a:solidFill>
-                  <a:srgbClr val="8C8C8C"/>
-                </a:solidFill>
-                <a:latin typeface="Arial"/>
-              </a:rPr>
-              <a:t/>
-            </a:r>
-          </a:p>
-        </p:txBody>
-      </p:sp>
-      <p:sp>
-        <p:nvSpPr>
-          <p:cNvPr id="4" name="TextBox 3"/>
-          <p:cNvSpPr txBox="1"/>
-          <p:nvPr/>
-        </p:nvSpPr>
-        <p:spPr>
-          <a:xfrm>
-            <a:off x="594360" y="3529584"/>
-            <a:ext cx="11002975" cy="685800"/>
-          </a:xfrm>
-          <a:prstGeom prst="rect">
-            <a:avLst/>
-          </a:prstGeom>
-          <a:noFill/>
-        </p:spPr>
-        <p:txBody>
-          <a:bodyPr wrap="square">
-            <a:spAutoFit/>
-          </a:bodyPr>
-          <a:lstStyle/>
-          <a:p>
-            <a:pPr algn="ctr"/>
-            <a:r>
-              <a:rPr sz="4266" b="1" i="0">
+            <a:off x="640080" y="2985516"/>
+            <a:ext cx="10911535" cy="731520"/>
+          </a:xfrm>
+          <a:prstGeom prst="rect">
+            <a:avLst/>
+          </a:prstGeom>
+          <a:noFill/>
+        </p:spPr>
+        <p:txBody>
+          <a:bodyPr wrap="square">
+            <a:spAutoFit/>
+          </a:bodyPr>
+          <a:lstStyle/>
+          <a:p>
+            <a:pPr algn="ctr"/>
+            <a:r>
+              <a:rPr sz="4600" b="1" i="0">
                 <a:solidFill>
                   <a:srgbClr val="FFFFFF"/>
                 </a:solidFill>
                 <a:latin typeface="Arial"/>
               </a:rPr>
               <a:t>Meu nome em Suas mãos foi gravado</a:t>
-            </a:r>
-          </a:p>
-        </p:txBody>
-      </p:sp>
-      <p:sp>
-        <p:nvSpPr>
-          <p:cNvPr id="5" name="TextBox 4"/>
-          <p:cNvSpPr txBox="1"/>
-          <p:nvPr/>
-        </p:nvSpPr>
-        <p:spPr>
-          <a:xfrm>
-            <a:off x="594360" y="4251960"/>
-            <a:ext cx="11002975" cy="347472"/>
-          </a:xfrm>
-          <a:prstGeom prst="rect">
-            <a:avLst/>
-          </a:prstGeom>
-          <a:noFill/>
-        </p:spPr>
-        <p:txBody>
-          <a:bodyPr wrap="square">
-            <a:spAutoFit/>
-          </a:bodyPr>
-          <a:lstStyle/>
-          <a:p>
-            <a:pPr algn="ctr"/>
-            <a:r>
-              <a:rPr sz="2200" b="0" i="1">
-                <a:solidFill>
-                  <a:srgbClr val="8C8C8C"/>
-                </a:solidFill>
-                <a:latin typeface="Arial"/>
-              </a:rPr>
-              <a:t/>
             </a:r>
           </a:p>
         </p:txBody>
@@ -3687,23 +3547,23 @@
         </p:nvSpPr>
         <p:spPr>
           <a:xfrm>
-            <a:off x="594360" y="2258568"/>
-            <a:ext cx="11002975" cy="685800"/>
-          </a:xfrm>
-          <a:prstGeom prst="rect">
-            <a:avLst/>
-          </a:prstGeom>
-          <a:noFill/>
-        </p:spPr>
-        <p:txBody>
-          <a:bodyPr wrap="square">
-            <a:spAutoFit/>
-          </a:bodyPr>
-          <a:lstStyle/>
-          <a:p>
-            <a:pPr algn="ctr"/>
-            <a:r>
-              <a:rPr sz="4400" b="1" i="0">
+            <a:off x="640080" y="2052828"/>
+            <a:ext cx="10911535" cy="731520"/>
+          </a:xfrm>
+          <a:prstGeom prst="rect">
+            <a:avLst/>
+          </a:prstGeom>
+          <a:noFill/>
+        </p:spPr>
+        <p:txBody>
+          <a:bodyPr wrap="square">
+            <a:spAutoFit/>
+          </a:bodyPr>
+          <a:lstStyle/>
+          <a:p>
+            <a:pPr algn="ctr"/>
+            <a:r>
+              <a:rPr sz="4800" b="1" i="0">
                 <a:solidFill>
                   <a:srgbClr val="FFFFFF"/>
                 </a:solidFill>
@@ -3722,99 +3582,29 @@
         </p:nvSpPr>
         <p:spPr>
           <a:xfrm>
-            <a:off x="594360" y="2980944"/>
-            <a:ext cx="11002975" cy="347472"/>
-          </a:xfrm>
-          <a:prstGeom prst="rect">
-            <a:avLst/>
-          </a:prstGeom>
-          <a:noFill/>
-        </p:spPr>
-        <p:txBody>
-          <a:bodyPr wrap="square">
-            <a:spAutoFit/>
-          </a:bodyPr>
-          <a:lstStyle/>
-          <a:p>
-            <a:pPr algn="ctr"/>
-            <a:r>
-              <a:rPr sz="2200" b="0" i="1">
-                <a:solidFill>
-                  <a:srgbClr val="8C8C8C"/>
-                </a:solidFill>
-                <a:latin typeface="Arial"/>
-              </a:rPr>
-              <a:t/>
-            </a:r>
-          </a:p>
-        </p:txBody>
-      </p:sp>
-      <p:sp>
-        <p:nvSpPr>
-          <p:cNvPr id="4" name="TextBox 3"/>
-          <p:cNvSpPr txBox="1"/>
-          <p:nvPr/>
-        </p:nvSpPr>
-        <p:spPr>
-          <a:xfrm>
-            <a:off x="594360" y="3529584"/>
-            <a:ext cx="11002975" cy="685800"/>
-          </a:xfrm>
-          <a:prstGeom prst="rect">
-            <a:avLst/>
-          </a:prstGeom>
-          <a:noFill/>
-        </p:spPr>
-        <p:txBody>
-          <a:bodyPr wrap="square">
-            <a:spAutoFit/>
-          </a:bodyPr>
-          <a:lstStyle/>
-          <a:p>
-            <a:pPr algn="ctr"/>
-            <a:r>
-              <a:rPr sz="4266" b="1" i="0">
+            <a:off x="640080" y="2985516"/>
+            <a:ext cx="10911535" cy="731520"/>
+          </a:xfrm>
+          <a:prstGeom prst="rect">
+            <a:avLst/>
+          </a:prstGeom>
+          <a:noFill/>
+        </p:spPr>
+        <p:txBody>
+          <a:bodyPr wrap="square">
+            <a:spAutoFit/>
+          </a:bodyPr>
+          <a:lstStyle/>
+          <a:p>
+            <a:pPr algn="ctr"/>
+            <a:r>
+              <a:rPr sz="4600" b="1" i="0">
                 <a:solidFill>
                   <a:srgbClr val="FFFFFF"/>
                 </a:solidFill>
                 <a:latin typeface="Arial"/>
               </a:rPr>
               <a:t>Sei que enquanto Ele vive por mim</a:t>
-            </a:r>
-          </a:p>
-        </p:txBody>
-      </p:sp>
-      <p:sp>
-        <p:nvSpPr>
-          <p:cNvPr id="5" name="TextBox 4"/>
-          <p:cNvSpPr txBox="1"/>
-          <p:nvPr/>
-        </p:nvSpPr>
-        <p:spPr>
-          <a:xfrm>
-            <a:off x="594360" y="4251960"/>
-            <a:ext cx="11002975" cy="347472"/>
-          </a:xfrm>
-          <a:prstGeom prst="rect">
-            <a:avLst/>
-          </a:prstGeom>
-          <a:noFill/>
-        </p:spPr>
-        <p:txBody>
-          <a:bodyPr wrap="square">
-            <a:spAutoFit/>
-          </a:bodyPr>
-          <a:lstStyle/>
-          <a:p>
-            <a:pPr algn="ctr"/>
-            <a:r>
-              <a:rPr sz="2200" b="0" i="1">
-                <a:solidFill>
-                  <a:srgbClr val="8C8C8C"/>
-                </a:solidFill>
-                <a:latin typeface="Arial"/>
-              </a:rPr>
-              <a:t/>
             </a:r>
           </a:p>
         </p:txBody>
@@ -3853,64 +3643,29 @@
         </p:nvSpPr>
         <p:spPr>
           <a:xfrm>
-            <a:off x="594360" y="2894076"/>
-            <a:ext cx="11002975" cy="685800"/>
-          </a:xfrm>
-          <a:prstGeom prst="rect">
-            <a:avLst/>
-          </a:prstGeom>
-          <a:noFill/>
-        </p:spPr>
-        <p:txBody>
-          <a:bodyPr wrap="square">
-            <a:spAutoFit/>
-          </a:bodyPr>
-          <a:lstStyle/>
-          <a:p>
-            <a:pPr algn="ctr"/>
-            <a:r>
-              <a:rPr sz="4400" b="1" i="0">
+            <a:off x="640080" y="2702052"/>
+            <a:ext cx="10911535" cy="731520"/>
+          </a:xfrm>
+          <a:prstGeom prst="rect">
+            <a:avLst/>
+          </a:prstGeom>
+          <a:noFill/>
+        </p:spPr>
+        <p:txBody>
+          <a:bodyPr wrap="square">
+            <a:spAutoFit/>
+          </a:bodyPr>
+          <a:lstStyle/>
+          <a:p>
+            <a:pPr algn="ctr"/>
+            <a:r>
+              <a:rPr sz="4800" b="1" i="0">
                 <a:solidFill>
                   <a:srgbClr val="FFFFFF"/>
                 </a:solidFill>
                 <a:latin typeface="Arial"/>
               </a:rPr>
               <a:t>Pela eternidade nunca morrerei</a:t>
-            </a:r>
-          </a:p>
-        </p:txBody>
-      </p:sp>
-      <p:sp>
-        <p:nvSpPr>
-          <p:cNvPr id="3" name="TextBox 2"/>
-          <p:cNvSpPr txBox="1"/>
-          <p:nvPr/>
-        </p:nvSpPr>
-        <p:spPr>
-          <a:xfrm>
-            <a:off x="594360" y="3616452"/>
-            <a:ext cx="11002975" cy="347472"/>
-          </a:xfrm>
-          <a:prstGeom prst="rect">
-            <a:avLst/>
-          </a:prstGeom>
-          <a:noFill/>
-        </p:spPr>
-        <p:txBody>
-          <a:bodyPr wrap="square">
-            <a:spAutoFit/>
-          </a:bodyPr>
-          <a:lstStyle/>
-          <a:p>
-            <a:pPr algn="ctr"/>
-            <a:r>
-              <a:rPr sz="2200" b="0" i="1">
-                <a:solidFill>
-                  <a:srgbClr val="8C8C8C"/>
-                </a:solidFill>
-                <a:latin typeface="Arial"/>
-              </a:rPr>
-              <a:t/>
             </a:r>
           </a:p>
         </p:txBody>
@@ -3949,23 +3704,23 @@
         </p:nvSpPr>
         <p:spPr>
           <a:xfrm>
-            <a:off x="594360" y="2258568"/>
-            <a:ext cx="11002975" cy="685800"/>
-          </a:xfrm>
-          <a:prstGeom prst="rect">
-            <a:avLst/>
-          </a:prstGeom>
-          <a:noFill/>
-        </p:spPr>
-        <p:txBody>
-          <a:bodyPr wrap="square">
-            <a:spAutoFit/>
-          </a:bodyPr>
-          <a:lstStyle/>
-          <a:p>
-            <a:pPr algn="ctr"/>
-            <a:r>
-              <a:rPr sz="3805" b="1" i="0">
+            <a:off x="640080" y="2052828"/>
+            <a:ext cx="10911535" cy="731520"/>
+          </a:xfrm>
+          <a:prstGeom prst="rect">
+            <a:avLst/>
+          </a:prstGeom>
+          <a:noFill/>
+        </p:spPr>
+        <p:txBody>
+          <a:bodyPr wrap="square">
+            <a:spAutoFit/>
+          </a:bodyPr>
+          <a:lstStyle/>
+          <a:p>
+            <a:pPr algn="ctr"/>
+            <a:r>
+              <a:rPr sz="4100" b="1" i="0">
                 <a:solidFill>
                   <a:srgbClr val="FFFFFF"/>
                 </a:solidFill>
@@ -3984,29 +3739,29 @@
         </p:nvSpPr>
         <p:spPr>
           <a:xfrm>
-            <a:off x="594360" y="2980944"/>
-            <a:ext cx="11002975" cy="347472"/>
-          </a:xfrm>
-          <a:prstGeom prst="rect">
-            <a:avLst/>
-          </a:prstGeom>
-          <a:noFill/>
-        </p:spPr>
-        <p:txBody>
-          <a:bodyPr wrap="square">
-            <a:spAutoFit/>
-          </a:bodyPr>
-          <a:lstStyle/>
-          <a:p>
-            <a:pPr algn="ctr"/>
-            <a:r>
-              <a:rPr sz="2200" b="0" i="1">
-                <a:solidFill>
-                  <a:srgbClr val="8C8C8C"/>
-                </a:solidFill>
-                <a:latin typeface="Arial"/>
-              </a:rPr>
-              <a:t/>
+            <a:off x="640080" y="2985516"/>
+            <a:ext cx="10911535" cy="731520"/>
+          </a:xfrm>
+          <a:prstGeom prst="rect">
+            <a:avLst/>
+          </a:prstGeom>
+          <a:noFill/>
+        </p:spPr>
+        <p:txBody>
+          <a:bodyPr wrap="square">
+            <a:spAutoFit/>
+          </a:bodyPr>
+          <a:lstStyle/>
+          <a:p>
+            <a:pPr algn="ctr"/>
+            <a:r>
+              <a:rPr sz="4800" b="1" i="0">
+                <a:solidFill>
+                  <a:srgbClr val="FFFFFF"/>
+                </a:solidFill>
+                <a:latin typeface="Arial"/>
+              </a:rPr>
+              <a:t>Com alegria elevo a voz</a:t>
             </a:r>
           </a:p>
         </p:txBody>
@@ -4019,29 +3774,29 @@
         </p:nvSpPr>
         <p:spPr>
           <a:xfrm>
-            <a:off x="594360" y="3529584"/>
-            <a:ext cx="11002975" cy="685800"/>
-          </a:xfrm>
-          <a:prstGeom prst="rect">
-            <a:avLst/>
-          </a:prstGeom>
-          <a:noFill/>
-        </p:spPr>
-        <p:txBody>
-          <a:bodyPr wrap="square">
-            <a:spAutoFit/>
-          </a:bodyPr>
-          <a:lstStyle/>
-          <a:p>
-            <a:pPr algn="ctr"/>
-            <a:r>
-              <a:rPr sz="4400" b="1" i="0">
-                <a:solidFill>
-                  <a:srgbClr val="FFFFFF"/>
-                </a:solidFill>
-                <a:latin typeface="Arial"/>
-              </a:rPr>
-              <a:t>Com alegria elevo a voz</a:t>
+            <a:off x="640080" y="4128516"/>
+            <a:ext cx="10911535" cy="310896"/>
+          </a:xfrm>
+          <a:prstGeom prst="rect">
+            <a:avLst/>
+          </a:prstGeom>
+          <a:noFill/>
+        </p:spPr>
+        <p:txBody>
+          <a:bodyPr wrap="square">
+            <a:spAutoFit/>
+          </a:bodyPr>
+          <a:lstStyle/>
+          <a:p>
+            <a:pPr algn="ctr"/>
+            <a:r>
+              <a:rPr sz="2000" b="0" i="0">
+                <a:solidFill>
+                  <a:srgbClr val="828282"/>
+                </a:solidFill>
+                <a:latin typeface="Arial"/>
+              </a:rPr>
+              <a:t>ハレルヤ    讃えよ</a:t>
             </a:r>
           </a:p>
         </p:txBody>
@@ -4054,29 +3809,29 @@
         </p:nvSpPr>
         <p:spPr>
           <a:xfrm>
-            <a:off x="594360" y="4251960"/>
-            <a:ext cx="11002975" cy="347472"/>
-          </a:xfrm>
-          <a:prstGeom prst="rect">
-            <a:avLst/>
-          </a:prstGeom>
-          <a:noFill/>
-        </p:spPr>
-        <p:txBody>
-          <a:bodyPr wrap="square">
-            <a:spAutoFit/>
-          </a:bodyPr>
-          <a:lstStyle/>
-          <a:p>
-            <a:pPr algn="ctr"/>
-            <a:r>
-              <a:rPr sz="2200" b="0" i="1">
-                <a:solidFill>
-                  <a:srgbClr val="8C8C8C"/>
-                </a:solidFill>
-                <a:latin typeface="Arial"/>
-              </a:rPr>
-              <a:t/>
+            <a:off x="640080" y="4494276"/>
+            <a:ext cx="10911535" cy="310896"/>
+          </a:xfrm>
+          <a:prstGeom prst="rect">
+            <a:avLst/>
+          </a:prstGeom>
+          <a:noFill/>
+        </p:spPr>
+        <p:txBody>
+          <a:bodyPr wrap="square">
+            <a:spAutoFit/>
+          </a:bodyPr>
+          <a:lstStyle/>
+          <a:p>
+            <a:pPr algn="ctr"/>
+            <a:r>
+              <a:rPr sz="2000" b="0" i="0">
+                <a:solidFill>
+                  <a:srgbClr val="828282"/>
+                </a:solidFill>
+                <a:latin typeface="Arial"/>
+              </a:rPr>
+              <a:t>復活の     神の    御子を</a:t>
             </a:r>
           </a:p>
         </p:txBody>
@@ -4115,23 +3870,23 @@
         </p:nvSpPr>
         <p:spPr>
           <a:xfrm>
-            <a:off x="594360" y="2894076"/>
-            <a:ext cx="11002975" cy="685800"/>
-          </a:xfrm>
-          <a:prstGeom prst="rect">
-            <a:avLst/>
-          </a:prstGeom>
-          <a:noFill/>
-        </p:spPr>
-        <p:txBody>
-          <a:bodyPr wrap="square">
-            <a:spAutoFit/>
-          </a:bodyPr>
-          <a:lstStyle/>
-          <a:p>
-            <a:pPr algn="ctr"/>
-            <a:r>
-              <a:rPr sz="4400" b="1" i="0">
+            <a:off x="640080" y="2702052"/>
+            <a:ext cx="10911535" cy="731520"/>
+          </a:xfrm>
+          <a:prstGeom prst="rect">
+            <a:avLst/>
+          </a:prstGeom>
+          <a:noFill/>
+        </p:spPr>
+        <p:txBody>
+          <a:bodyPr wrap="square">
+            <a:spAutoFit/>
+          </a:bodyPr>
+          <a:lstStyle/>
+          <a:p>
+            <a:pPr algn="ctr"/>
+            <a:r>
+              <a:rPr sz="4800" b="1" i="0">
                 <a:solidFill>
                   <a:srgbClr val="FFFFFF"/>
                 </a:solidFill>
@@ -4150,29 +3905,29 @@
         </p:nvSpPr>
         <p:spPr>
           <a:xfrm>
-            <a:off x="594360" y="3616452"/>
-            <a:ext cx="11002975" cy="347472"/>
-          </a:xfrm>
-          <a:prstGeom prst="rect">
-            <a:avLst/>
-          </a:prstGeom>
-          <a:noFill/>
-        </p:spPr>
-        <p:txBody>
-          <a:bodyPr wrap="square">
-            <a:spAutoFit/>
-          </a:bodyPr>
-          <a:lstStyle/>
-          <a:p>
-            <a:pPr algn="ctr"/>
-            <a:r>
-              <a:rPr sz="2200" b="0" i="1">
-                <a:solidFill>
-                  <a:srgbClr val="8C8C8C"/>
-                </a:solidFill>
-                <a:latin typeface="Arial"/>
-              </a:rPr>
-              <a:t/>
+            <a:off x="640080" y="3845052"/>
+            <a:ext cx="10911535" cy="310896"/>
+          </a:xfrm>
+          <a:prstGeom prst="rect">
+            <a:avLst/>
+          </a:prstGeom>
+          <a:noFill/>
+        </p:spPr>
+        <p:txBody>
+          <a:bodyPr wrap="square">
+            <a:spAutoFit/>
+          </a:bodyPr>
+          <a:lstStyle/>
+          <a:p>
+            <a:pPr algn="ctr"/>
+            <a:r>
+              <a:rPr sz="2000" b="0" i="0">
+                <a:solidFill>
+                  <a:srgbClr val="828282"/>
+                </a:solidFill>
+                <a:latin typeface="Arial"/>
+              </a:rPr>
+              <a:t>ハレルヤ    讃えよ</a:t>
             </a:r>
           </a:p>
         </p:txBody>
@@ -4211,23 +3966,23 @@
         </p:nvSpPr>
         <p:spPr>
           <a:xfrm>
-            <a:off x="594360" y="1837944"/>
-            <a:ext cx="11002975" cy="685800"/>
-          </a:xfrm>
-          <a:prstGeom prst="rect">
-            <a:avLst/>
-          </a:prstGeom>
-          <a:noFill/>
-        </p:spPr>
-        <p:txBody>
-          <a:bodyPr wrap="square">
-            <a:spAutoFit/>
-          </a:bodyPr>
-          <a:lstStyle/>
-          <a:p>
-            <a:pPr algn="ctr"/>
-            <a:r>
-              <a:rPr sz="4400" b="1" i="0">
+            <a:off x="640080" y="1650492"/>
+            <a:ext cx="10911535" cy="731520"/>
+          </a:xfrm>
+          <a:prstGeom prst="rect">
+            <a:avLst/>
+          </a:prstGeom>
+          <a:noFill/>
+        </p:spPr>
+        <p:txBody>
+          <a:bodyPr wrap="square">
+            <a:spAutoFit/>
+          </a:bodyPr>
+          <a:lstStyle/>
+          <a:p>
+            <a:pPr algn="ctr"/>
+            <a:r>
+              <a:rPr sz="4800" b="1" i="0">
                 <a:solidFill>
                   <a:srgbClr val="FFFFFF"/>
                 </a:solidFill>
@@ -4246,8 +4001,8 @@
         </p:nvSpPr>
         <p:spPr>
           <a:xfrm>
-            <a:off x="594360" y="2560320"/>
-            <a:ext cx="11002975" cy="384048"/>
+            <a:off x="640080" y="2418588"/>
+            <a:ext cx="10911535" cy="365760"/>
           </a:xfrm>
           <a:prstGeom prst="rect">
             <a:avLst/>
@@ -4264,7 +4019,7 @@
             <a:r>
               <a:rPr sz="2400" b="0" i="1">
                 <a:solidFill>
-                  <a:srgbClr val="B4B4B4"/>
+                  <a:srgbClr val="AAAAAA"/>
                 </a:solidFill>
                 <a:latin typeface="Arial"/>
               </a:rPr>
@@ -4281,8 +4036,78 @@
         </p:nvSpPr>
         <p:spPr>
           <a:xfrm>
-            <a:off x="594360" y="2980944"/>
-            <a:ext cx="11002975" cy="347472"/>
+            <a:off x="640080" y="2985516"/>
+            <a:ext cx="10911535" cy="731520"/>
+          </a:xfrm>
+          <a:prstGeom prst="rect">
+            <a:avLst/>
+          </a:prstGeom>
+          <a:noFill/>
+        </p:spPr>
+        <p:txBody>
+          <a:bodyPr wrap="square">
+            <a:spAutoFit/>
+          </a:bodyPr>
+          <a:lstStyle/>
+          <a:p>
+            <a:pPr algn="ctr"/>
+            <a:r>
+              <a:rPr sz="4800" b="1" i="0">
+                <a:solidFill>
+                  <a:srgbClr val="FFFFFF"/>
+                </a:solidFill>
+                <a:latin typeface="Arial"/>
+              </a:rPr>
+              <a:t>復活の     神の    御子を</a:t>
+            </a:r>
+          </a:p>
+        </p:txBody>
+      </p:sp>
+      <p:sp>
+        <p:nvSpPr>
+          <p:cNvPr id="5" name="TextBox 4"/>
+          <p:cNvSpPr txBox="1"/>
+          <p:nvPr/>
+        </p:nvSpPr>
+        <p:spPr>
+          <a:xfrm>
+            <a:off x="640080" y="3753612"/>
+            <a:ext cx="10911535" cy="365760"/>
+          </a:xfrm>
+          <a:prstGeom prst="rect">
+            <a:avLst/>
+          </a:prstGeom>
+          <a:noFill/>
+        </p:spPr>
+        <p:txBody>
+          <a:bodyPr wrap="square">
+            <a:spAutoFit/>
+          </a:bodyPr>
+          <a:lstStyle/>
+          <a:p>
+            <a:pPr algn="ctr"/>
+            <a:r>
+              <a:rPr sz="2400" b="0" i="1">
+                <a:solidFill>
+                  <a:srgbClr val="AAAAAA"/>
+                </a:solidFill>
+                <a:latin typeface="Arial"/>
+              </a:rPr>
+              <a:t>fukkatsu no kami no miko wo</a:t>
+            </a:r>
+          </a:p>
+        </p:txBody>
+      </p:sp>
+      <p:sp>
+        <p:nvSpPr>
+          <p:cNvPr id="6" name="TextBox 5"/>
+          <p:cNvSpPr txBox="1"/>
+          <p:nvPr/>
+        </p:nvSpPr>
+        <p:spPr>
+          <a:xfrm>
+            <a:off x="640080" y="4530852"/>
+            <a:ext cx="10911535" cy="310896"/>
           </a:xfrm>
           <a:prstGeom prst="rect">
             <a:avLst/>
@@ -4299,81 +4124,11 @@
             <a:r>
               <a:rPr sz="2000" b="0" i="1">
                 <a:solidFill>
-                  <a:srgbClr val="8C8C8C"/>
-                </a:solidFill>
-                <a:latin typeface="Arial"/>
-              </a:rPr>
-              <a:t/>
-            </a:r>
-          </a:p>
-        </p:txBody>
-      </p:sp>
-      <p:sp>
-        <p:nvSpPr>
-          <p:cNvPr id="5" name="TextBox 4"/>
-          <p:cNvSpPr txBox="1"/>
-          <p:nvPr/>
-        </p:nvSpPr>
-        <p:spPr>
-          <a:xfrm>
-            <a:off x="594360" y="3529584"/>
-            <a:ext cx="11002975" cy="685800"/>
-          </a:xfrm>
-          <a:prstGeom prst="rect">
-            <a:avLst/>
-          </a:prstGeom>
-          <a:noFill/>
-        </p:spPr>
-        <p:txBody>
-          <a:bodyPr wrap="square">
-            <a:spAutoFit/>
-          </a:bodyPr>
-          <a:lstStyle/>
-          <a:p>
-            <a:pPr algn="ctr"/>
-            <a:r>
-              <a:rPr sz="4400" b="1" i="0">
-                <a:solidFill>
-                  <a:srgbClr val="FFFFFF"/>
-                </a:solidFill>
-                <a:latin typeface="Arial"/>
-              </a:rPr>
-              <a:t>復活の     神の    御子を</a:t>
-            </a:r>
-          </a:p>
-        </p:txBody>
-      </p:sp>
-      <p:sp>
-        <p:nvSpPr>
-          <p:cNvPr id="6" name="TextBox 5"/>
-          <p:cNvSpPr txBox="1"/>
-          <p:nvPr/>
-        </p:nvSpPr>
-        <p:spPr>
-          <a:xfrm>
-            <a:off x="594360" y="4251960"/>
-            <a:ext cx="11002975" cy="384048"/>
-          </a:xfrm>
-          <a:prstGeom prst="rect">
-            <a:avLst/>
-          </a:prstGeom>
-          <a:noFill/>
-        </p:spPr>
-        <p:txBody>
-          <a:bodyPr wrap="square">
-            <a:spAutoFit/>
-          </a:bodyPr>
-          <a:lstStyle/>
-          <a:p>
-            <a:pPr algn="ctr"/>
-            <a:r>
-              <a:rPr sz="2400" b="0" i="1">
-                <a:solidFill>
-                  <a:srgbClr val="B4B4B4"/>
-                </a:solidFill>
-                <a:latin typeface="Arial"/>
-              </a:rPr>
-              <a:t>fukkatsu no kami no miko wo</a:t>
+                  <a:srgbClr val="828282"/>
+                </a:solidFill>
+                <a:latin typeface="Arial"/>
+              </a:rPr>
+              <a:t>O Senhor ressuscitou dentre os mortos</a:t>
             </a:r>
           </a:p>
         </p:txBody>
@@ -4386,8 +4141,8 @@
         </p:nvSpPr>
         <p:spPr>
           <a:xfrm>
-            <a:off x="594360" y="4672584"/>
-            <a:ext cx="11002975" cy="347472"/>
+            <a:off x="640080" y="4896612"/>
+            <a:ext cx="10911535" cy="310896"/>
           </a:xfrm>
           <a:prstGeom prst="rect">
             <a:avLst/>
@@ -4404,11 +4159,11 @@
             <a:r>
               <a:rPr sz="2000" b="0" i="1">
                 <a:solidFill>
-                  <a:srgbClr val="8C8C8C"/>
-                </a:solidFill>
-                <a:latin typeface="Arial"/>
-              </a:rPr>
-              <a:t/>
+                  <a:srgbClr val="828282"/>
+                </a:solidFill>
+                <a:latin typeface="Arial"/>
+              </a:rPr>
+              <a:t>Com alegria elevo a voz</a:t>
             </a:r>
           </a:p>
         </p:txBody>
@@ -4447,23 +4202,23 @@
         </p:nvSpPr>
         <p:spPr>
           <a:xfrm>
-            <a:off x="594360" y="1837944"/>
-            <a:ext cx="11002975" cy="685800"/>
-          </a:xfrm>
-          <a:prstGeom prst="rect">
-            <a:avLst/>
-          </a:prstGeom>
-          <a:noFill/>
-        </p:spPr>
-        <p:txBody>
-          <a:bodyPr wrap="square">
-            <a:spAutoFit/>
-          </a:bodyPr>
-          <a:lstStyle/>
-          <a:p>
-            <a:pPr algn="ctr"/>
-            <a:r>
-              <a:rPr sz="4223" b="1" i="0">
+            <a:off x="640080" y="1650492"/>
+            <a:ext cx="10911535" cy="731520"/>
+          </a:xfrm>
+          <a:prstGeom prst="rect">
+            <a:avLst/>
+          </a:prstGeom>
+          <a:noFill/>
+        </p:spPr>
+        <p:txBody>
+          <a:bodyPr wrap="square">
+            <a:spAutoFit/>
+          </a:bodyPr>
+          <a:lstStyle/>
+          <a:p>
+            <a:pPr algn="ctr"/>
+            <a:r>
+              <a:rPr sz="4600" b="1" i="0">
                 <a:solidFill>
                   <a:srgbClr val="FFFFFF"/>
                 </a:solidFill>
@@ -4482,8 +4237,8 @@
         </p:nvSpPr>
         <p:spPr>
           <a:xfrm>
-            <a:off x="594360" y="2560320"/>
-            <a:ext cx="11002975" cy="384048"/>
+            <a:off x="640080" y="2418588"/>
+            <a:ext cx="10911535" cy="365760"/>
           </a:xfrm>
           <a:prstGeom prst="rect">
             <a:avLst/>
@@ -4500,7 +4255,7 @@
             <a:r>
               <a:rPr sz="2400" b="0" i="1">
                 <a:solidFill>
-                  <a:srgbClr val="B4B4B4"/>
+                  <a:srgbClr val="AAAAAA"/>
                 </a:solidFill>
                 <a:latin typeface="Arial"/>
               </a:rPr>
@@ -4517,8 +4272,78 @@
         </p:nvSpPr>
         <p:spPr>
           <a:xfrm>
-            <a:off x="594360" y="2980944"/>
-            <a:ext cx="11002975" cy="347472"/>
+            <a:off x="640080" y="2985516"/>
+            <a:ext cx="10911535" cy="731520"/>
+          </a:xfrm>
+          <a:prstGeom prst="rect">
+            <a:avLst/>
+          </a:prstGeom>
+          <a:noFill/>
+        </p:spPr>
+        <p:txBody>
+          <a:bodyPr wrap="square">
+            <a:spAutoFit/>
+          </a:bodyPr>
+          <a:lstStyle/>
+          <a:p>
+            <a:pPr algn="ctr"/>
+            <a:r>
+              <a:rPr sz="4800" b="1" i="0">
+                <a:solidFill>
+                  <a:srgbClr val="FFFFFF"/>
+                </a:solidFill>
+                <a:latin typeface="Arial"/>
+              </a:rPr>
+              <a:t>私を      てん から 引きはなす ことは</a:t>
+            </a:r>
+          </a:p>
+        </p:txBody>
+      </p:sp>
+      <p:sp>
+        <p:nvSpPr>
+          <p:cNvPr id="5" name="TextBox 4"/>
+          <p:cNvSpPr txBox="1"/>
+          <p:nvPr/>
+        </p:nvSpPr>
+        <p:spPr>
+          <a:xfrm>
+            <a:off x="640080" y="3753612"/>
+            <a:ext cx="10911535" cy="365760"/>
+          </a:xfrm>
+          <a:prstGeom prst="rect">
+            <a:avLst/>
+          </a:prstGeom>
+          <a:noFill/>
+        </p:spPr>
+        <p:txBody>
+          <a:bodyPr wrap="square">
+            <a:spAutoFit/>
+          </a:bodyPr>
+          <a:lstStyle/>
+          <a:p>
+            <a:pPr algn="ctr"/>
+            <a:r>
+              <a:rPr sz="2400" b="0" i="1">
+                <a:solidFill>
+                  <a:srgbClr val="AAAAAA"/>
+                </a:solidFill>
+                <a:latin typeface="Arial"/>
+              </a:rPr>
+              <a:t>watashiwo tenkara hikihanasu kotowa</a:t>
+            </a:r>
+          </a:p>
+        </p:txBody>
+      </p:sp>
+      <p:sp>
+        <p:nvSpPr>
+          <p:cNvPr id="6" name="TextBox 5"/>
+          <p:cNvSpPr txBox="1"/>
+          <p:nvPr/>
+        </p:nvSpPr>
+        <p:spPr>
+          <a:xfrm>
+            <a:off x="640080" y="4530852"/>
+            <a:ext cx="10911535" cy="310896"/>
           </a:xfrm>
           <a:prstGeom prst="rect">
             <a:avLst/>
@@ -4535,81 +4360,11 @@
             <a:r>
               <a:rPr sz="2000" b="0" i="1">
                 <a:solidFill>
-                  <a:srgbClr val="8C8C8C"/>
-                </a:solidFill>
-                <a:latin typeface="Arial"/>
-              </a:rPr>
-              <a:t/>
-            </a:r>
-          </a:p>
-        </p:txBody>
-      </p:sp>
-      <p:sp>
-        <p:nvSpPr>
-          <p:cNvPr id="5" name="TextBox 4"/>
-          <p:cNvSpPr txBox="1"/>
-          <p:nvPr/>
-        </p:nvSpPr>
-        <p:spPr>
-          <a:xfrm>
-            <a:off x="594360" y="3529584"/>
-            <a:ext cx="11002975" cy="685800"/>
-          </a:xfrm>
-          <a:prstGeom prst="rect">
-            <a:avLst/>
-          </a:prstGeom>
-          <a:noFill/>
-        </p:spPr>
-        <p:txBody>
-          <a:bodyPr wrap="square">
-            <a:spAutoFit/>
-          </a:bodyPr>
-          <a:lstStyle/>
-          <a:p>
-            <a:pPr algn="ctr"/>
-            <a:r>
-              <a:rPr sz="4400" b="1" i="0">
-                <a:solidFill>
-                  <a:srgbClr val="FFFFFF"/>
-                </a:solidFill>
-                <a:latin typeface="Arial"/>
-              </a:rPr>
-              <a:t>私を      てん から 引きはなす ことは</a:t>
-            </a:r>
-          </a:p>
-        </p:txBody>
-      </p:sp>
-      <p:sp>
-        <p:nvSpPr>
-          <p:cNvPr id="6" name="TextBox 5"/>
-          <p:cNvSpPr txBox="1"/>
-          <p:nvPr/>
-        </p:nvSpPr>
-        <p:spPr>
-          <a:xfrm>
-            <a:off x="594360" y="4251960"/>
-            <a:ext cx="11002975" cy="384048"/>
-          </a:xfrm>
-          <a:prstGeom prst="rect">
-            <a:avLst/>
-          </a:prstGeom>
-          <a:noFill/>
-        </p:spPr>
-        <p:txBody>
-          <a:bodyPr wrap="square">
-            <a:spAutoFit/>
-          </a:bodyPr>
-          <a:lstStyle/>
-          <a:p>
-            <a:pPr algn="ctr"/>
-            <a:r>
-              <a:rPr sz="2400" b="0" i="1">
-                <a:solidFill>
-                  <a:srgbClr val="B4B4B4"/>
-                </a:solidFill>
-                <a:latin typeface="Arial"/>
-              </a:rPr>
-              <a:t>watashiwo tenkara hikihanasu kotowa</a:t>
+                  <a:srgbClr val="828282"/>
+                </a:solidFill>
+                <a:latin typeface="Arial"/>
+              </a:rPr>
+              <a:t>Tenho base segura e perfeita</a:t>
             </a:r>
           </a:p>
         </p:txBody>
@@ -4622,8 +4377,8 @@
         </p:nvSpPr>
         <p:spPr>
           <a:xfrm>
-            <a:off x="594360" y="4672584"/>
-            <a:ext cx="11002975" cy="347472"/>
+            <a:off x="640080" y="4896612"/>
+            <a:ext cx="10911535" cy="310896"/>
           </a:xfrm>
           <a:prstGeom prst="rect">
             <a:avLst/>
@@ -4640,11 +4395,11 @@
             <a:r>
               <a:rPr sz="2000" b="0" i="1">
                 <a:solidFill>
-                  <a:srgbClr val="8C8C8C"/>
-                </a:solidFill>
-                <a:latin typeface="Arial"/>
-              </a:rPr>
-              <a:t/>
+                  <a:srgbClr val="828282"/>
+                </a:solidFill>
+                <a:latin typeface="Arial"/>
+              </a:rPr>
+              <a:t>Um grande Sumo Sacerdote cujo nome é Amor</a:t>
             </a:r>
           </a:p>
         </p:txBody>
@@ -4683,23 +4438,23 @@
         </p:nvSpPr>
         <p:spPr>
           <a:xfrm>
-            <a:off x="594360" y="2683764"/>
-            <a:ext cx="11002975" cy="685800"/>
-          </a:xfrm>
-          <a:prstGeom prst="rect">
-            <a:avLst/>
-          </a:prstGeom>
-          <a:noFill/>
-        </p:spPr>
-        <p:txBody>
-          <a:bodyPr wrap="square">
-            <a:spAutoFit/>
-          </a:bodyPr>
-          <a:lstStyle/>
-          <a:p>
-            <a:pPr algn="ctr"/>
-            <a:r>
-              <a:rPr sz="4400" b="1" i="0">
+            <a:off x="640080" y="2500884"/>
+            <a:ext cx="10911535" cy="731520"/>
+          </a:xfrm>
+          <a:prstGeom prst="rect">
+            <a:avLst/>
+          </a:prstGeom>
+          <a:noFill/>
+        </p:spPr>
+        <p:txBody>
+          <a:bodyPr wrap="square">
+            <a:spAutoFit/>
+          </a:bodyPr>
+          <a:lstStyle/>
+          <a:p>
+            <a:pPr algn="ctr"/>
+            <a:r>
+              <a:rPr sz="4800" b="1" i="0">
                 <a:solidFill>
                   <a:srgbClr val="FFFFFF"/>
                 </a:solidFill>
@@ -4718,8 +4473,8 @@
         </p:nvSpPr>
         <p:spPr>
           <a:xfrm>
-            <a:off x="594360" y="3406140"/>
-            <a:ext cx="11002975" cy="384048"/>
+            <a:off x="640080" y="3268980"/>
+            <a:ext cx="10911535" cy="365760"/>
           </a:xfrm>
           <a:prstGeom prst="rect">
             <a:avLst/>
@@ -4736,7 +4491,7 @@
             <a:r>
               <a:rPr sz="2400" b="0" i="1">
                 <a:solidFill>
-                  <a:srgbClr val="B4B4B4"/>
+                  <a:srgbClr val="AAAAAA"/>
                 </a:solidFill>
                 <a:latin typeface="Arial"/>
               </a:rPr>
@@ -4753,8 +4508,8 @@
         </p:nvSpPr>
         <p:spPr>
           <a:xfrm>
-            <a:off x="594360" y="3826764"/>
-            <a:ext cx="11002975" cy="347472"/>
+            <a:off x="640080" y="4046220"/>
+            <a:ext cx="10911535" cy="310896"/>
           </a:xfrm>
           <a:prstGeom prst="rect">
             <a:avLst/>
@@ -4771,11 +4526,11 @@
             <a:r>
               <a:rPr sz="2000" b="0" i="1">
                 <a:solidFill>
-                  <a:srgbClr val="8C8C8C"/>
-                </a:solidFill>
-                <a:latin typeface="Arial"/>
-              </a:rPr>
-              <a:t/>
+                  <a:srgbClr val="828282"/>
+                </a:solidFill>
+                <a:latin typeface="Arial"/>
+              </a:rPr>
+              <a:t>Que por mim está e intercede</a:t>
             </a:r>
           </a:p>
         </p:txBody>
@@ -4814,23 +4569,23 @@
         </p:nvSpPr>
         <p:spPr>
           <a:xfrm>
-            <a:off x="594360" y="1837944"/>
-            <a:ext cx="11002975" cy="685800"/>
-          </a:xfrm>
-          <a:prstGeom prst="rect">
-            <a:avLst/>
-          </a:prstGeom>
-          <a:noFill/>
-        </p:spPr>
-        <p:txBody>
-          <a:bodyPr wrap="square">
-            <a:spAutoFit/>
-          </a:bodyPr>
-          <a:lstStyle/>
-          <a:p>
-            <a:pPr algn="ctr"/>
-            <a:r>
-              <a:rPr sz="4400" b="1" i="0">
+            <a:off x="640080" y="1650492"/>
+            <a:ext cx="10911535" cy="731520"/>
+          </a:xfrm>
+          <a:prstGeom prst="rect">
+            <a:avLst/>
+          </a:prstGeom>
+          <a:noFill/>
+        </p:spPr>
+        <p:txBody>
+          <a:bodyPr wrap="square">
+            <a:spAutoFit/>
+          </a:bodyPr>
+          <a:lstStyle/>
+          <a:p>
+            <a:pPr algn="ctr"/>
+            <a:r>
+              <a:rPr sz="4800" b="1" i="0">
                 <a:solidFill>
                   <a:srgbClr val="FFFFFF"/>
                 </a:solidFill>
@@ -4849,8 +4604,8 @@
         </p:nvSpPr>
         <p:spPr>
           <a:xfrm>
-            <a:off x="594360" y="2560320"/>
-            <a:ext cx="11002975" cy="384048"/>
+            <a:off x="640080" y="2418588"/>
+            <a:ext cx="10911535" cy="365760"/>
           </a:xfrm>
           <a:prstGeom prst="rect">
             <a:avLst/>
@@ -4867,7 +4622,7 @@
             <a:r>
               <a:rPr sz="2400" b="0" i="1">
                 <a:solidFill>
-                  <a:srgbClr val="B4B4B4"/>
+                  <a:srgbClr val="AAAAAA"/>
                 </a:solidFill>
                 <a:latin typeface="Arial"/>
               </a:rPr>
@@ -4884,8 +4639,78 @@
         </p:nvSpPr>
         <p:spPr>
           <a:xfrm>
-            <a:off x="594360" y="2980944"/>
-            <a:ext cx="11002975" cy="347472"/>
+            <a:off x="640080" y="2985516"/>
+            <a:ext cx="10911535" cy="731520"/>
+          </a:xfrm>
+          <a:prstGeom prst="rect">
+            <a:avLst/>
+          </a:prstGeom>
+          <a:noFill/>
+        </p:spPr>
+        <p:txBody>
+          <a:bodyPr wrap="square">
+            <a:spAutoFit/>
+          </a:bodyPr>
+          <a:lstStyle/>
+          <a:p>
+            <a:pPr algn="ctr"/>
+            <a:r>
+              <a:rPr sz="4800" b="1" i="0">
+                <a:solidFill>
+                  <a:srgbClr val="FFFFFF"/>
+                </a:solidFill>
+                <a:latin typeface="Arial"/>
+              </a:rPr>
+              <a:t>目をあげて　み れば</a:t>
+            </a:r>
+          </a:p>
+        </p:txBody>
+      </p:sp>
+      <p:sp>
+        <p:nvSpPr>
+          <p:cNvPr id="5" name="TextBox 4"/>
+          <p:cNvSpPr txBox="1"/>
+          <p:nvPr/>
+        </p:nvSpPr>
+        <p:spPr>
+          <a:xfrm>
+            <a:off x="640080" y="3753612"/>
+            <a:ext cx="10911535" cy="365760"/>
+          </a:xfrm>
+          <a:prstGeom prst="rect">
+            <a:avLst/>
+          </a:prstGeom>
+          <a:noFill/>
+        </p:spPr>
+        <p:txBody>
+          <a:bodyPr wrap="square">
+            <a:spAutoFit/>
+          </a:bodyPr>
+          <a:lstStyle/>
+          <a:p>
+            <a:pPr algn="ctr"/>
+            <a:r>
+              <a:rPr sz="2400" b="0" i="1">
+                <a:solidFill>
+                  <a:srgbClr val="AAAAAA"/>
+                </a:solidFill>
+                <a:latin typeface="Arial"/>
+              </a:rPr>
+              <a:t>mewoagete mireba</a:t>
+            </a:r>
+          </a:p>
+        </p:txBody>
+      </p:sp>
+      <p:sp>
+        <p:nvSpPr>
+          <p:cNvPr id="6" name="TextBox 5"/>
+          <p:cNvSpPr txBox="1"/>
+          <p:nvPr/>
+        </p:nvSpPr>
+        <p:spPr>
+          <a:xfrm>
+            <a:off x="640080" y="4530852"/>
+            <a:ext cx="10911535" cy="310896"/>
           </a:xfrm>
           <a:prstGeom prst="rect">
             <a:avLst/>
@@ -4902,81 +4727,11 @@
             <a:r>
               <a:rPr sz="2000" b="0" i="1">
                 <a:solidFill>
-                  <a:srgbClr val="8C8C8C"/>
-                </a:solidFill>
-                <a:latin typeface="Arial"/>
-              </a:rPr>
-              <a:t/>
-            </a:r>
-          </a:p>
-        </p:txBody>
-      </p:sp>
-      <p:sp>
-        <p:nvSpPr>
-          <p:cNvPr id="5" name="TextBox 4"/>
-          <p:cNvSpPr txBox="1"/>
-          <p:nvPr/>
-        </p:nvSpPr>
-        <p:spPr>
-          <a:xfrm>
-            <a:off x="594360" y="3529584"/>
-            <a:ext cx="11002975" cy="685800"/>
-          </a:xfrm>
-          <a:prstGeom prst="rect">
-            <a:avLst/>
-          </a:prstGeom>
-          <a:noFill/>
-        </p:spPr>
-        <p:txBody>
-          <a:bodyPr wrap="square">
-            <a:spAutoFit/>
-          </a:bodyPr>
-          <a:lstStyle/>
-          <a:p>
-            <a:pPr algn="ctr"/>
-            <a:r>
-              <a:rPr sz="4400" b="1" i="0">
-                <a:solidFill>
-                  <a:srgbClr val="FFFFFF"/>
-                </a:solidFill>
-                <a:latin typeface="Arial"/>
-              </a:rPr>
-              <a:t>目をあげて　み れば</a:t>
-            </a:r>
-          </a:p>
-        </p:txBody>
-      </p:sp>
-      <p:sp>
-        <p:nvSpPr>
-          <p:cNvPr id="6" name="TextBox 5"/>
-          <p:cNvSpPr txBox="1"/>
-          <p:nvPr/>
-        </p:nvSpPr>
-        <p:spPr>
-          <a:xfrm>
-            <a:off x="594360" y="4251960"/>
-            <a:ext cx="11002975" cy="384048"/>
-          </a:xfrm>
-          <a:prstGeom prst="rect">
-            <a:avLst/>
-          </a:prstGeom>
-          <a:noFill/>
-        </p:spPr>
-        <p:txBody>
-          <a:bodyPr wrap="square">
-            <a:spAutoFit/>
-          </a:bodyPr>
-          <a:lstStyle/>
-          <a:p>
-            <a:pPr algn="ctr"/>
-            <a:r>
-              <a:rPr sz="2400" b="0" i="1">
-                <a:solidFill>
-                  <a:srgbClr val="B4B4B4"/>
-                </a:solidFill>
-                <a:latin typeface="Arial"/>
-              </a:rPr>
-              <a:t>mewoagete mireba</a:t>
+                  <a:srgbClr val="828282"/>
+                </a:solidFill>
+                <a:latin typeface="Arial"/>
+              </a:rPr>
+              <a:t>Diante do Trono de Deus</a:t>
             </a:r>
           </a:p>
         </p:txBody>
@@ -4989,8 +4744,8 @@
         </p:nvSpPr>
         <p:spPr>
           <a:xfrm>
-            <a:off x="594360" y="4672584"/>
-            <a:ext cx="11002975" cy="347472"/>
+            <a:off x="640080" y="4896612"/>
+            <a:ext cx="10911535" cy="310896"/>
           </a:xfrm>
           <a:prstGeom prst="rect">
             <a:avLst/>
@@ -5007,11 +4762,11 @@
             <a:r>
               <a:rPr sz="2000" b="0" i="1">
                 <a:solidFill>
-                  <a:srgbClr val="8C8C8C"/>
-                </a:solidFill>
-                <a:latin typeface="Arial"/>
-              </a:rPr>
-              <a:t/>
+                  <a:srgbClr val="828282"/>
+                </a:solidFill>
+                <a:latin typeface="Arial"/>
+              </a:rPr>
+              <a:t>Diante do trono de Deus acima</a:t>
             </a:r>
           </a:p>
         </p:txBody>
@@ -5050,23 +4805,23 @@
         </p:nvSpPr>
         <p:spPr>
           <a:xfrm>
-            <a:off x="594360" y="1837944"/>
-            <a:ext cx="11002975" cy="685800"/>
-          </a:xfrm>
-          <a:prstGeom prst="rect">
-            <a:avLst/>
-          </a:prstGeom>
-          <a:noFill/>
-        </p:spPr>
-        <p:txBody>
-          <a:bodyPr wrap="square">
-            <a:spAutoFit/>
-          </a:bodyPr>
-          <a:lstStyle/>
-          <a:p>
-            <a:pPr algn="ctr"/>
-            <a:r>
-              <a:rPr sz="4400" b="1" i="0">
+            <a:off x="640080" y="1650492"/>
+            <a:ext cx="10911535" cy="731520"/>
+          </a:xfrm>
+          <a:prstGeom prst="rect">
+            <a:avLst/>
+          </a:prstGeom>
+          <a:noFill/>
+        </p:spPr>
+        <p:txBody>
+          <a:bodyPr wrap="square">
+            <a:spAutoFit/>
+          </a:bodyPr>
+          <a:lstStyle/>
+          <a:p>
+            <a:pPr algn="ctr"/>
+            <a:r>
+              <a:rPr sz="4800" b="1" i="0">
                 <a:solidFill>
                   <a:srgbClr val="FFFFFF"/>
                 </a:solidFill>
@@ -5085,8 +4840,8 @@
         </p:nvSpPr>
         <p:spPr>
           <a:xfrm>
-            <a:off x="594360" y="2560320"/>
-            <a:ext cx="11002975" cy="384048"/>
+            <a:off x="640080" y="2418588"/>
+            <a:ext cx="10911535" cy="365760"/>
           </a:xfrm>
           <a:prstGeom prst="rect">
             <a:avLst/>
@@ -5103,7 +4858,7 @@
             <a:r>
               <a:rPr sz="2400" b="0" i="1">
                 <a:solidFill>
-                  <a:srgbClr val="B4B4B4"/>
+                  <a:srgbClr val="AAAAAA"/>
                 </a:solidFill>
                 <a:latin typeface="Arial"/>
               </a:rPr>
@@ -5120,8 +4875,78 @@
         </p:nvSpPr>
         <p:spPr>
           <a:xfrm>
-            <a:off x="594360" y="2980944"/>
-            <a:ext cx="11002975" cy="347472"/>
+            <a:off x="640080" y="2985516"/>
+            <a:ext cx="10911535" cy="731520"/>
+          </a:xfrm>
+          <a:prstGeom prst="rect">
+            <a:avLst/>
+          </a:prstGeom>
+          <a:noFill/>
+        </p:spPr>
+        <p:txBody>
+          <a:bodyPr wrap="square">
+            <a:spAutoFit/>
+          </a:bodyPr>
+          <a:lstStyle/>
+          <a:p>
+            <a:pPr algn="ctr"/>
+            <a:r>
+              <a:rPr sz="4800" b="1" i="0">
+                <a:solidFill>
+                  <a:srgbClr val="FFFFFF"/>
+                </a:solidFill>
+                <a:latin typeface="Arial"/>
+              </a:rPr>
+              <a:t>罪なき　　　　主は  死に</a:t>
+            </a:r>
+          </a:p>
+        </p:txBody>
+      </p:sp>
+      <p:sp>
+        <p:nvSpPr>
+          <p:cNvPr id="5" name="TextBox 4"/>
+          <p:cNvSpPr txBox="1"/>
+          <p:nvPr/>
+        </p:nvSpPr>
+        <p:spPr>
+          <a:xfrm>
+            <a:off x="640080" y="3753612"/>
+            <a:ext cx="10911535" cy="365760"/>
+          </a:xfrm>
+          <a:prstGeom prst="rect">
+            <a:avLst/>
+          </a:prstGeom>
+          <a:noFill/>
+        </p:spPr>
+        <p:txBody>
+          <a:bodyPr wrap="square">
+            <a:spAutoFit/>
+          </a:bodyPr>
+          <a:lstStyle/>
+          <a:p>
+            <a:pPr algn="ctr"/>
+            <a:r>
+              <a:rPr sz="2400" b="0" i="1">
+                <a:solidFill>
+                  <a:srgbClr val="AAAAAA"/>
+                </a:solidFill>
+                <a:latin typeface="Arial"/>
+              </a:rPr>
+              <a:t>tsuminaki shuwa shini</a:t>
+            </a:r>
+          </a:p>
+        </p:txBody>
+      </p:sp>
+      <p:sp>
+        <p:nvSpPr>
+          <p:cNvPr id="6" name="TextBox 5"/>
+          <p:cNvSpPr txBox="1"/>
+          <p:nvPr/>
+        </p:nvSpPr>
+        <p:spPr>
+          <a:xfrm>
+            <a:off x="640080" y="4530852"/>
+            <a:ext cx="10911535" cy="310896"/>
           </a:xfrm>
           <a:prstGeom prst="rect">
             <a:avLst/>
@@ -5138,81 +4963,11 @@
             <a:r>
               <a:rPr sz="2000" b="0" i="1">
                 <a:solidFill>
-                  <a:srgbClr val="8C8C8C"/>
-                </a:solidFill>
-                <a:latin typeface="Arial"/>
-              </a:rPr>
-              <a:t/>
-            </a:r>
-          </a:p>
-        </p:txBody>
-      </p:sp>
-      <p:sp>
-        <p:nvSpPr>
-          <p:cNvPr id="5" name="TextBox 4"/>
-          <p:cNvSpPr txBox="1"/>
-          <p:nvPr/>
-        </p:nvSpPr>
-        <p:spPr>
-          <a:xfrm>
-            <a:off x="594360" y="3529584"/>
-            <a:ext cx="11002975" cy="685800"/>
-          </a:xfrm>
-          <a:prstGeom prst="rect">
-            <a:avLst/>
-          </a:prstGeom>
-          <a:noFill/>
-        </p:spPr>
-        <p:txBody>
-          <a:bodyPr wrap="square">
-            <a:spAutoFit/>
-          </a:bodyPr>
-          <a:lstStyle/>
-          <a:p>
-            <a:pPr algn="ctr"/>
-            <a:r>
-              <a:rPr sz="4400" b="1" i="0">
-                <a:solidFill>
-                  <a:srgbClr val="FFFFFF"/>
-                </a:solidFill>
-                <a:latin typeface="Arial"/>
-              </a:rPr>
-              <a:t>罪なき　　　　主は  死に</a:t>
-            </a:r>
-          </a:p>
-        </p:txBody>
-      </p:sp>
-      <p:sp>
-        <p:nvSpPr>
-          <p:cNvPr id="6" name="TextBox 5"/>
-          <p:cNvSpPr txBox="1"/>
-          <p:nvPr/>
-        </p:nvSpPr>
-        <p:spPr>
-          <a:xfrm>
-            <a:off x="594360" y="4251960"/>
-            <a:ext cx="11002975" cy="384048"/>
-          </a:xfrm>
-          <a:prstGeom prst="rect">
-            <a:avLst/>
-          </a:prstGeom>
-          <a:noFill/>
-        </p:spPr>
-        <p:txBody>
-          <a:bodyPr wrap="square">
-            <a:spAutoFit/>
-          </a:bodyPr>
-          <a:lstStyle/>
-          <a:p>
-            <a:pPr algn="ctr"/>
-            <a:r>
-              <a:rPr sz="2400" b="0" i="1">
-                <a:solidFill>
-                  <a:srgbClr val="B4B4B4"/>
-                </a:solidFill>
-                <a:latin typeface="Arial"/>
-              </a:rPr>
-              <a:t>tsuminaki shuwa shini</a:t>
+                  <a:srgbClr val="828282"/>
+                </a:solidFill>
+                <a:latin typeface="Arial"/>
+              </a:rPr>
+              <a:t>Tenho base segura e perfeita</a:t>
             </a:r>
           </a:p>
         </p:txBody>
@@ -5225,8 +4980,8 @@
         </p:nvSpPr>
         <p:spPr>
           <a:xfrm>
-            <a:off x="594360" y="4672584"/>
-            <a:ext cx="11002975" cy="347472"/>
+            <a:off x="640080" y="4896612"/>
+            <a:ext cx="10911535" cy="310896"/>
           </a:xfrm>
           <a:prstGeom prst="rect">
             <a:avLst/>
@@ -5243,11 +4998,11 @@
             <a:r>
               <a:rPr sz="2000" b="0" i="1">
                 <a:solidFill>
-                  <a:srgbClr val="8C8C8C"/>
-                </a:solidFill>
-                <a:latin typeface="Arial"/>
-              </a:rPr>
-              <a:t/>
+                  <a:srgbClr val="828282"/>
+                </a:solidFill>
+                <a:latin typeface="Arial"/>
+              </a:rPr>
+              <a:t>Um grande Sumo Sacerdote cujo nome é Amor</a:t>
             </a:r>
           </a:p>
         </p:txBody>
@@ -5286,23 +5041,23 @@
         </p:nvSpPr>
         <p:spPr>
           <a:xfrm>
-            <a:off x="594360" y="1837944"/>
-            <a:ext cx="11002975" cy="685800"/>
-          </a:xfrm>
-          <a:prstGeom prst="rect">
-            <a:avLst/>
-          </a:prstGeom>
-          <a:noFill/>
-        </p:spPr>
-        <p:txBody>
-          <a:bodyPr wrap="square">
-            <a:spAutoFit/>
-          </a:bodyPr>
-          <a:lstStyle/>
-          <a:p>
-            <a:pPr algn="ctr"/>
-            <a:r>
-              <a:rPr sz="4400" b="1" i="0">
+            <a:off x="640080" y="1650492"/>
+            <a:ext cx="10911535" cy="731520"/>
+          </a:xfrm>
+          <a:prstGeom prst="rect">
+            <a:avLst/>
+          </a:prstGeom>
+          <a:noFill/>
+        </p:spPr>
+        <p:txBody>
+          <a:bodyPr wrap="square">
+            <a:spAutoFit/>
+          </a:bodyPr>
+          <a:lstStyle/>
+          <a:p>
+            <a:pPr algn="ctr"/>
+            <a:r>
+              <a:rPr sz="4800" b="1" i="0">
                 <a:solidFill>
                   <a:srgbClr val="FFFFFF"/>
                 </a:solidFill>
@@ -5321,8 +5076,8 @@
         </p:nvSpPr>
         <p:spPr>
           <a:xfrm>
-            <a:off x="594360" y="2560320"/>
-            <a:ext cx="11002975" cy="384048"/>
+            <a:off x="640080" y="2418588"/>
+            <a:ext cx="10911535" cy="365760"/>
           </a:xfrm>
           <a:prstGeom prst="rect">
             <a:avLst/>
@@ -5339,7 +5094,7 @@
             <a:r>
               <a:rPr sz="2400" b="0" i="1">
                 <a:solidFill>
-                  <a:srgbClr val="B4B4B4"/>
+                  <a:srgbClr val="AAAAAA"/>
                 </a:solidFill>
                 <a:latin typeface="Arial"/>
               </a:rPr>
@@ -5356,8 +5111,78 @@
         </p:nvSpPr>
         <p:spPr>
           <a:xfrm>
-            <a:off x="594360" y="2980944"/>
-            <a:ext cx="11002975" cy="347472"/>
+            <a:off x="640080" y="2985516"/>
+            <a:ext cx="10911535" cy="731520"/>
+          </a:xfrm>
+          <a:prstGeom prst="rect">
+            <a:avLst/>
+          </a:prstGeom>
+          <a:noFill/>
+        </p:spPr>
+        <p:txBody>
+          <a:bodyPr wrap="square">
+            <a:spAutoFit/>
+          </a:bodyPr>
+          <a:lstStyle/>
+          <a:p>
+            <a:pPr algn="ctr"/>
+            <a:r>
+              <a:rPr sz="4800" b="1" i="0">
+                <a:solidFill>
+                  <a:srgbClr val="FFFFFF"/>
+                </a:solidFill>
+                <a:latin typeface="Arial"/>
+              </a:rPr>
+              <a:t>赦され　　満た され　　ただ主を見上げる</a:t>
+            </a:r>
+          </a:p>
+        </p:txBody>
+      </p:sp>
+      <p:sp>
+        <p:nvSpPr>
+          <p:cNvPr id="5" name="TextBox 4"/>
+          <p:cNvSpPr txBox="1"/>
+          <p:nvPr/>
+        </p:nvSpPr>
+        <p:spPr>
+          <a:xfrm>
+            <a:off x="640080" y="3753612"/>
+            <a:ext cx="10911535" cy="365760"/>
+          </a:xfrm>
+          <a:prstGeom prst="rect">
+            <a:avLst/>
+          </a:prstGeom>
+          <a:noFill/>
+        </p:spPr>
+        <p:txBody>
+          <a:bodyPr wrap="square">
+            <a:spAutoFit/>
+          </a:bodyPr>
+          <a:lstStyle/>
+          <a:p>
+            <a:pPr algn="ctr"/>
+            <a:r>
+              <a:rPr sz="2400" b="0" i="1">
+                <a:solidFill>
+                  <a:srgbClr val="AAAAAA"/>
+                </a:solidFill>
+                <a:latin typeface="Arial"/>
+              </a:rPr>
+              <a:t>yurusare mitasare tadashuwo miageru</a:t>
+            </a:r>
+          </a:p>
+        </p:txBody>
+      </p:sp>
+      <p:sp>
+        <p:nvSpPr>
+          <p:cNvPr id="6" name="TextBox 5"/>
+          <p:cNvSpPr txBox="1"/>
+          <p:nvPr/>
+        </p:nvSpPr>
+        <p:spPr>
+          <a:xfrm>
+            <a:off x="640080" y="4530852"/>
+            <a:ext cx="10911535" cy="310896"/>
           </a:xfrm>
           <a:prstGeom prst="rect">
             <a:avLst/>
@@ -5374,81 +5199,11 @@
             <a:r>
               <a:rPr sz="2000" b="0" i="1">
                 <a:solidFill>
-                  <a:srgbClr val="8C8C8C"/>
-                </a:solidFill>
-                <a:latin typeface="Arial"/>
-              </a:rPr>
-              <a:t/>
-            </a:r>
-          </a:p>
-        </p:txBody>
-      </p:sp>
-      <p:sp>
-        <p:nvSpPr>
-          <p:cNvPr id="5" name="TextBox 4"/>
-          <p:cNvSpPr txBox="1"/>
-          <p:nvPr/>
-        </p:nvSpPr>
-        <p:spPr>
-          <a:xfrm>
-            <a:off x="594360" y="3529584"/>
-            <a:ext cx="11002975" cy="685800"/>
-          </a:xfrm>
-          <a:prstGeom prst="rect">
-            <a:avLst/>
-          </a:prstGeom>
-          <a:noFill/>
-        </p:spPr>
-        <p:txBody>
-          <a:bodyPr wrap="square">
-            <a:spAutoFit/>
-          </a:bodyPr>
-          <a:lstStyle/>
-          <a:p>
-            <a:pPr algn="ctr"/>
-            <a:r>
-              <a:rPr sz="4400" b="1" i="0">
-                <a:solidFill>
-                  <a:srgbClr val="FFFFFF"/>
-                </a:solidFill>
-                <a:latin typeface="Arial"/>
-              </a:rPr>
-              <a:t>赦され　　満た され　　ただ主を見上げる</a:t>
-            </a:r>
-          </a:p>
-        </p:txBody>
-      </p:sp>
-      <p:sp>
-        <p:nvSpPr>
-          <p:cNvPr id="6" name="TextBox 5"/>
-          <p:cNvSpPr txBox="1"/>
-          <p:nvPr/>
-        </p:nvSpPr>
-        <p:spPr>
-          <a:xfrm>
-            <a:off x="594360" y="4251960"/>
-            <a:ext cx="11002975" cy="384048"/>
-          </a:xfrm>
-          <a:prstGeom prst="rect">
-            <a:avLst/>
-          </a:prstGeom>
-          <a:noFill/>
-        </p:spPr>
-        <p:txBody>
-          <a:bodyPr wrap="square">
-            <a:spAutoFit/>
-          </a:bodyPr>
-          <a:lstStyle/>
-          <a:p>
-            <a:pPr algn="ctr"/>
-            <a:r>
-              <a:rPr sz="2400" b="0" i="1">
-                <a:solidFill>
-                  <a:srgbClr val="B4B4B4"/>
-                </a:solidFill>
-                <a:latin typeface="Arial"/>
-              </a:rPr>
-              <a:t>yurusare mitasare tadashuwo miageru</a:t>
+                  <a:srgbClr val="828282"/>
+                </a:solidFill>
+                <a:latin typeface="Arial"/>
+              </a:rPr>
+              <a:t>Que por mim está e intercede</a:t>
             </a:r>
           </a:p>
         </p:txBody>
@@ -5461,8 +5216,8 @@
         </p:nvSpPr>
         <p:spPr>
           <a:xfrm>
-            <a:off x="594360" y="4672584"/>
-            <a:ext cx="11002975" cy="347472"/>
+            <a:off x="640080" y="4896612"/>
+            <a:ext cx="10911535" cy="310896"/>
           </a:xfrm>
           <a:prstGeom prst="rect">
             <a:avLst/>
@@ -5479,11 +5234,11 @@
             <a:r>
               <a:rPr sz="2000" b="0" i="1">
                 <a:solidFill>
-                  <a:srgbClr val="8C8C8C"/>
-                </a:solidFill>
-                <a:latin typeface="Arial"/>
-              </a:rPr>
-              <a:t/>
+                  <a:srgbClr val="828282"/>
+                </a:solidFill>
+                <a:latin typeface="Arial"/>
+              </a:rPr>
+              <a:t>Meu nome em Suas mãos foi gravado</a:t>
             </a:r>
           </a:p>
         </p:txBody>
@@ -5522,23 +5277,23 @@
         </p:nvSpPr>
         <p:spPr>
           <a:xfrm>
-            <a:off x="594360" y="2683764"/>
-            <a:ext cx="11002975" cy="685800"/>
-          </a:xfrm>
-          <a:prstGeom prst="rect">
-            <a:avLst/>
-          </a:prstGeom>
-          <a:noFill/>
-        </p:spPr>
-        <p:txBody>
-          <a:bodyPr wrap="square">
-            <a:spAutoFit/>
-          </a:bodyPr>
-          <a:lstStyle/>
-          <a:p>
-            <a:pPr algn="ctr"/>
-            <a:r>
-              <a:rPr sz="4400" b="1" i="0">
+            <a:off x="640080" y="2500884"/>
+            <a:ext cx="10911535" cy="731520"/>
+          </a:xfrm>
+          <a:prstGeom prst="rect">
+            <a:avLst/>
+          </a:prstGeom>
+          <a:noFill/>
+        </p:spPr>
+        <p:txBody>
+          <a:bodyPr wrap="square">
+            <a:spAutoFit/>
+          </a:bodyPr>
+          <a:lstStyle/>
+          <a:p>
+            <a:pPr algn="ctr"/>
+            <a:r>
+              <a:rPr sz="4800" b="1" i="0">
                 <a:solidFill>
                   <a:srgbClr val="FFFFFF"/>
                 </a:solidFill>
@@ -5557,8 +5312,8 @@
         </p:nvSpPr>
         <p:spPr>
           <a:xfrm>
-            <a:off x="594360" y="3406140"/>
-            <a:ext cx="11002975" cy="384048"/>
+            <a:off x="640080" y="3268980"/>
+            <a:ext cx="10911535" cy="365760"/>
           </a:xfrm>
           <a:prstGeom prst="rect">
             <a:avLst/>
@@ -5575,7 +5330,7 @@
             <a:r>
               <a:rPr sz="2400" b="0" i="1">
                 <a:solidFill>
-                  <a:srgbClr val="B4B4B4"/>
+                  <a:srgbClr val="AAAAAA"/>
                 </a:solidFill>
                 <a:latin typeface="Arial"/>
               </a:rPr>
@@ -5592,8 +5347,8 @@
         </p:nvSpPr>
         <p:spPr>
           <a:xfrm>
-            <a:off x="594360" y="3826764"/>
-            <a:ext cx="11002975" cy="347472"/>
+            <a:off x="640080" y="4046220"/>
+            <a:ext cx="10911535" cy="310896"/>
           </a:xfrm>
           <a:prstGeom prst="rect">
             <a:avLst/>
@@ -5610,11 +5365,11 @@
             <a:r>
               <a:rPr sz="2000" b="0" i="1">
                 <a:solidFill>
-                  <a:srgbClr val="8C8C8C"/>
-                </a:solidFill>
-                <a:latin typeface="Arial"/>
-              </a:rPr>
-              <a:t/>
+                  <a:srgbClr val="828282"/>
+                </a:solidFill>
+                <a:latin typeface="Arial"/>
+              </a:rPr>
+              <a:t>Meu nome em Seu coração escrito</a:t>
             </a:r>
           </a:p>
         </p:txBody>
@@ -5653,23 +5408,23 @@
         </p:nvSpPr>
         <p:spPr>
           <a:xfrm>
-            <a:off x="594360" y="1837944"/>
-            <a:ext cx="11002975" cy="685800"/>
-          </a:xfrm>
-          <a:prstGeom prst="rect">
-            <a:avLst/>
-          </a:prstGeom>
-          <a:noFill/>
-        </p:spPr>
-        <p:txBody>
-          <a:bodyPr wrap="square">
-            <a:spAutoFit/>
-          </a:bodyPr>
-          <a:lstStyle/>
-          <a:p>
-            <a:pPr algn="ctr"/>
-            <a:r>
-              <a:rPr sz="4400" b="1" i="0">
+            <a:off x="640080" y="1650492"/>
+            <a:ext cx="10911535" cy="731520"/>
+          </a:xfrm>
+          <a:prstGeom prst="rect">
+            <a:avLst/>
+          </a:prstGeom>
+          <a:noFill/>
+        </p:spPr>
+        <p:txBody>
+          <a:bodyPr wrap="square">
+            <a:spAutoFit/>
+          </a:bodyPr>
+          <a:lstStyle/>
+          <a:p>
+            <a:pPr algn="ctr"/>
+            <a:r>
+              <a:rPr sz="4800" b="1" i="0">
                 <a:solidFill>
                   <a:srgbClr val="FFFFFF"/>
                 </a:solidFill>
@@ -5688,8 +5443,8 @@
         </p:nvSpPr>
         <p:spPr>
           <a:xfrm>
-            <a:off x="594360" y="2560320"/>
-            <a:ext cx="11002975" cy="384048"/>
+            <a:off x="640080" y="2418588"/>
+            <a:ext cx="10911535" cy="365760"/>
           </a:xfrm>
           <a:prstGeom prst="rect">
             <a:avLst/>
@@ -5706,7 +5461,7 @@
             <a:r>
               <a:rPr sz="2400" b="0" i="1">
                 <a:solidFill>
-                  <a:srgbClr val="B4B4B4"/>
+                  <a:srgbClr val="AAAAAA"/>
                 </a:solidFill>
                 <a:latin typeface="Arial"/>
               </a:rPr>
@@ -5723,8 +5478,78 @@
         </p:nvSpPr>
         <p:spPr>
           <a:xfrm>
-            <a:off x="594360" y="2980944"/>
-            <a:ext cx="11002975" cy="347472"/>
+            <a:off x="640080" y="2985516"/>
+            <a:ext cx="10911535" cy="731520"/>
+          </a:xfrm>
+          <a:prstGeom prst="rect">
+            <a:avLst/>
+          </a:prstGeom>
+          <a:noFill/>
+        </p:spPr>
+        <p:txBody>
+          <a:bodyPr wrap="square">
+            <a:spAutoFit/>
+          </a:bodyPr>
+          <a:lstStyle/>
+          <a:p>
+            <a:pPr algn="ctr"/>
+            <a:r>
+              <a:rPr sz="4800" b="1" i="0">
+                <a:solidFill>
+                  <a:srgbClr val="FFFFFF"/>
+                </a:solidFill>
+                <a:latin typeface="Arial"/>
+              </a:rPr>
+              <a:t>復活の     神の    御子を</a:t>
+            </a:r>
+          </a:p>
+        </p:txBody>
+      </p:sp>
+      <p:sp>
+        <p:nvSpPr>
+          <p:cNvPr id="5" name="TextBox 4"/>
+          <p:cNvSpPr txBox="1"/>
+          <p:nvPr/>
+        </p:nvSpPr>
+        <p:spPr>
+          <a:xfrm>
+            <a:off x="640080" y="3753612"/>
+            <a:ext cx="10911535" cy="365760"/>
+          </a:xfrm>
+          <a:prstGeom prst="rect">
+            <a:avLst/>
+          </a:prstGeom>
+          <a:noFill/>
+        </p:spPr>
+        <p:txBody>
+          <a:bodyPr wrap="square">
+            <a:spAutoFit/>
+          </a:bodyPr>
+          <a:lstStyle/>
+          <a:p>
+            <a:pPr algn="ctr"/>
+            <a:r>
+              <a:rPr sz="2400" b="0" i="1">
+                <a:solidFill>
+                  <a:srgbClr val="AAAAAA"/>
+                </a:solidFill>
+                <a:latin typeface="Arial"/>
+              </a:rPr>
+              <a:t>hukkatsuno Kamino mikowo</a:t>
+            </a:r>
+          </a:p>
+        </p:txBody>
+      </p:sp>
+      <p:sp>
+        <p:nvSpPr>
+          <p:cNvPr id="6" name="TextBox 5"/>
+          <p:cNvSpPr txBox="1"/>
+          <p:nvPr/>
+        </p:nvSpPr>
+        <p:spPr>
+          <a:xfrm>
+            <a:off x="640080" y="4530852"/>
+            <a:ext cx="10911535" cy="310896"/>
           </a:xfrm>
           <a:prstGeom prst="rect">
             <a:avLst/>
@@ -5741,81 +5566,11 @@
             <a:r>
               <a:rPr sz="2000" b="0" i="1">
                 <a:solidFill>
-                  <a:srgbClr val="8C8C8C"/>
-                </a:solidFill>
-                <a:latin typeface="Arial"/>
-              </a:rPr>
-              <a:t/>
-            </a:r>
-          </a:p>
-        </p:txBody>
-      </p:sp>
-      <p:sp>
-        <p:nvSpPr>
-          <p:cNvPr id="5" name="TextBox 4"/>
-          <p:cNvSpPr txBox="1"/>
-          <p:nvPr/>
-        </p:nvSpPr>
-        <p:spPr>
-          <a:xfrm>
-            <a:off x="594360" y="3529584"/>
-            <a:ext cx="11002975" cy="685800"/>
-          </a:xfrm>
-          <a:prstGeom prst="rect">
-            <a:avLst/>
-          </a:prstGeom>
-          <a:noFill/>
-        </p:spPr>
-        <p:txBody>
-          <a:bodyPr wrap="square">
-            <a:spAutoFit/>
-          </a:bodyPr>
-          <a:lstStyle/>
-          <a:p>
-            <a:pPr algn="ctr"/>
-            <a:r>
-              <a:rPr sz="4400" b="1" i="0">
-                <a:solidFill>
-                  <a:srgbClr val="FFFFFF"/>
-                </a:solidFill>
-                <a:latin typeface="Arial"/>
-              </a:rPr>
-              <a:t>復活の     神の    御子を</a:t>
-            </a:r>
-          </a:p>
-        </p:txBody>
-      </p:sp>
-      <p:sp>
-        <p:nvSpPr>
-          <p:cNvPr id="6" name="TextBox 5"/>
-          <p:cNvSpPr txBox="1"/>
-          <p:nvPr/>
-        </p:nvSpPr>
-        <p:spPr>
-          <a:xfrm>
-            <a:off x="594360" y="4251960"/>
-            <a:ext cx="11002975" cy="384048"/>
-          </a:xfrm>
-          <a:prstGeom prst="rect">
-            <a:avLst/>
-          </a:prstGeom>
-          <a:noFill/>
-        </p:spPr>
-        <p:txBody>
-          <a:bodyPr wrap="square">
-            <a:spAutoFit/>
-          </a:bodyPr>
-          <a:lstStyle/>
-          <a:p>
-            <a:pPr algn="ctr"/>
-            <a:r>
-              <a:rPr sz="2400" b="0" i="1">
-                <a:solidFill>
-                  <a:srgbClr val="B4B4B4"/>
-                </a:solidFill>
-                <a:latin typeface="Arial"/>
-              </a:rPr>
-              <a:t>hukkatsuno Kamino mikowo</a:t>
+                  <a:srgbClr val="828282"/>
+                </a:solidFill>
+                <a:latin typeface="Arial"/>
+              </a:rPr>
+              <a:t>O Senhor ressuscitou dentre os mortos</a:t>
             </a:r>
           </a:p>
         </p:txBody>
@@ -5828,8 +5583,8 @@
         </p:nvSpPr>
         <p:spPr>
           <a:xfrm>
-            <a:off x="594360" y="4672584"/>
-            <a:ext cx="11002975" cy="347472"/>
+            <a:off x="640080" y="4896612"/>
+            <a:ext cx="10911535" cy="310896"/>
           </a:xfrm>
           <a:prstGeom prst="rect">
             <a:avLst/>
@@ -5846,11 +5601,11 @@
             <a:r>
               <a:rPr sz="2000" b="0" i="1">
                 <a:solidFill>
-                  <a:srgbClr val="8C8C8C"/>
-                </a:solidFill>
-                <a:latin typeface="Arial"/>
-              </a:rPr>
-              <a:t/>
+                  <a:srgbClr val="828282"/>
+                </a:solidFill>
+                <a:latin typeface="Arial"/>
+              </a:rPr>
+              <a:t>Com alegria elevo a voz</a:t>
             </a:r>
           </a:p>
         </p:txBody>
@@ -5889,23 +5644,23 @@
         </p:nvSpPr>
         <p:spPr>
           <a:xfrm>
-            <a:off x="594360" y="2258568"/>
-            <a:ext cx="11002975" cy="685800"/>
-          </a:xfrm>
-          <a:prstGeom prst="rect">
-            <a:avLst/>
-          </a:prstGeom>
-          <a:noFill/>
-        </p:spPr>
-        <p:txBody>
-          <a:bodyPr wrap="square">
-            <a:spAutoFit/>
-          </a:bodyPr>
-          <a:lstStyle/>
-          <a:p>
-            <a:pPr algn="ctr"/>
-            <a:r>
-              <a:rPr sz="4400" b="1" i="0">
+            <a:off x="640080" y="2052828"/>
+            <a:ext cx="10911535" cy="731520"/>
+          </a:xfrm>
+          <a:prstGeom prst="rect">
+            <a:avLst/>
+          </a:prstGeom>
+          <a:noFill/>
+        </p:spPr>
+        <p:txBody>
+          <a:bodyPr wrap="square">
+            <a:spAutoFit/>
+          </a:bodyPr>
+          <a:lstStyle/>
+          <a:p>
+            <a:pPr algn="ctr"/>
+            <a:r>
+              <a:rPr sz="4800" b="1" i="0">
                 <a:solidFill>
                   <a:srgbClr val="FFFFFF"/>
                 </a:solidFill>
@@ -5924,99 +5679,29 @@
         </p:nvSpPr>
         <p:spPr>
           <a:xfrm>
-            <a:off x="594360" y="2980944"/>
-            <a:ext cx="11002975" cy="347472"/>
-          </a:xfrm>
-          <a:prstGeom prst="rect">
-            <a:avLst/>
-          </a:prstGeom>
-          <a:noFill/>
-        </p:spPr>
-        <p:txBody>
-          <a:bodyPr wrap="square">
-            <a:spAutoFit/>
-          </a:bodyPr>
-          <a:lstStyle/>
-          <a:p>
-            <a:pPr algn="ctr"/>
-            <a:r>
-              <a:rPr sz="2200" b="0" i="1">
-                <a:solidFill>
-                  <a:srgbClr val="8C8C8C"/>
-                </a:solidFill>
-                <a:latin typeface="Arial"/>
-              </a:rPr>
-              <a:t/>
-            </a:r>
-          </a:p>
-        </p:txBody>
-      </p:sp>
-      <p:sp>
-        <p:nvSpPr>
-          <p:cNvPr id="4" name="TextBox 3"/>
-          <p:cNvSpPr txBox="1"/>
-          <p:nvPr/>
-        </p:nvSpPr>
-        <p:spPr>
-          <a:xfrm>
-            <a:off x="594360" y="3529584"/>
-            <a:ext cx="11002975" cy="685800"/>
-          </a:xfrm>
-          <a:prstGeom prst="rect">
-            <a:avLst/>
-          </a:prstGeom>
-          <a:noFill/>
-        </p:spPr>
-        <p:txBody>
-          <a:bodyPr wrap="square">
-            <a:spAutoFit/>
-          </a:bodyPr>
-          <a:lstStyle/>
-          <a:p>
-            <a:pPr algn="ctr"/>
-            <a:r>
-              <a:rPr sz="4400" b="1" i="0">
+            <a:off x="640080" y="2985516"/>
+            <a:ext cx="10911535" cy="731520"/>
+          </a:xfrm>
+          <a:prstGeom prst="rect">
+            <a:avLst/>
+          </a:prstGeom>
+          <a:noFill/>
+        </p:spPr>
+        <p:txBody>
+          <a:bodyPr wrap="square">
+            <a:spAutoFit/>
+          </a:bodyPr>
+          <a:lstStyle/>
+          <a:p>
+            <a:pPr algn="ctr"/>
+            <a:r>
+              <a:rPr sz="4800" b="1" i="0">
                 <a:solidFill>
                   <a:srgbClr val="FFFFFF"/>
                 </a:solidFill>
                 <a:latin typeface="Arial"/>
               </a:rPr>
               <a:t>Diante do trono de Deus acima</a:t>
-            </a:r>
-          </a:p>
-        </p:txBody>
-      </p:sp>
-      <p:sp>
-        <p:nvSpPr>
-          <p:cNvPr id="5" name="TextBox 4"/>
-          <p:cNvSpPr txBox="1"/>
-          <p:nvPr/>
-        </p:nvSpPr>
-        <p:spPr>
-          <a:xfrm>
-            <a:off x="594360" y="4251960"/>
-            <a:ext cx="11002975" cy="347472"/>
-          </a:xfrm>
-          <a:prstGeom prst="rect">
-            <a:avLst/>
-          </a:prstGeom>
-          <a:noFill/>
-        </p:spPr>
-        <p:txBody>
-          <a:bodyPr wrap="square">
-            <a:spAutoFit/>
-          </a:bodyPr>
-          <a:lstStyle/>
-          <a:p>
-            <a:pPr algn="ctr"/>
-            <a:r>
-              <a:rPr sz="2200" b="0" i="1">
-                <a:solidFill>
-                  <a:srgbClr val="8C8C8C"/>
-                </a:solidFill>
-                <a:latin typeface="Arial"/>
-              </a:rPr>
-              <a:t/>
             </a:r>
           </a:p>
         </p:txBody>

--- a/output_pptx/Before_The_Throne_Of_God_Above.pptx
+++ b/output_pptx/Before_The_Throne_Of_God_Above.pptx
@@ -3417,6 +3417,76 @@
           </a:p>
         </p:txBody>
       </p:sp>
+      <p:sp>
+        <p:nvSpPr>
+          <p:cNvPr id="4" name="TextBox 3"/>
+          <p:cNvSpPr txBox="1"/>
+          <p:nvPr/>
+        </p:nvSpPr>
+        <p:spPr>
+          <a:xfrm>
+            <a:off x="640080" y="4128516"/>
+            <a:ext cx="10911535" cy="310896"/>
+          </a:xfrm>
+          <a:prstGeom prst="rect">
+            <a:avLst/>
+          </a:prstGeom>
+          <a:noFill/>
+        </p:spPr>
+        <p:txBody>
+          <a:bodyPr wrap="square">
+            <a:spAutoFit/>
+          </a:bodyPr>
+          <a:lstStyle/>
+          <a:p>
+            <a:pPr algn="ctr"/>
+            <a:r>
+              <a:rPr sz="2000" b="0" i="0">
+                <a:solidFill>
+                  <a:srgbClr val="828282"/>
+                </a:solidFill>
+                <a:latin typeface="Arial"/>
+              </a:rPr>
+              <a:t>堅い、完全な基盤を持っている</a:t>
+            </a:r>
+          </a:p>
+        </p:txBody>
+      </p:sp>
+      <p:sp>
+        <p:nvSpPr>
+          <p:cNvPr id="5" name="TextBox 4"/>
+          <p:cNvSpPr txBox="1"/>
+          <p:nvPr/>
+        </p:nvSpPr>
+        <p:spPr>
+          <a:xfrm>
+            <a:off x="640080" y="4494276"/>
+            <a:ext cx="10911535" cy="310896"/>
+          </a:xfrm>
+          <a:prstGeom prst="rect">
+            <a:avLst/>
+          </a:prstGeom>
+          <a:noFill/>
+        </p:spPr>
+        <p:txBody>
+          <a:bodyPr wrap="square">
+            <a:spAutoFit/>
+          </a:bodyPr>
+          <a:lstStyle/>
+          <a:p>
+            <a:pPr algn="ctr"/>
+            <a:r>
+              <a:rPr sz="2000" b="0" i="0">
+                <a:solidFill>
+                  <a:srgbClr val="828282"/>
+                </a:solidFill>
+                <a:latin typeface="Arial"/>
+              </a:rPr>
+              <a:t>愛という名の大いなる大祭司</a:t>
+            </a:r>
+          </a:p>
+        </p:txBody>
+      </p:sp>
     </p:spTree>
   </p:cSld>
   <p:clrMapOvr>
@@ -3513,6 +3583,76 @@
           </a:p>
         </p:txBody>
       </p:sp>
+      <p:sp>
+        <p:nvSpPr>
+          <p:cNvPr id="4" name="TextBox 3"/>
+          <p:cNvSpPr txBox="1"/>
+          <p:nvPr/>
+        </p:nvSpPr>
+        <p:spPr>
+          <a:xfrm>
+            <a:off x="640080" y="4128516"/>
+            <a:ext cx="10911535" cy="310896"/>
+          </a:xfrm>
+          <a:prstGeom prst="rect">
+            <a:avLst/>
+          </a:prstGeom>
+          <a:noFill/>
+        </p:spPr>
+        <p:txBody>
+          <a:bodyPr wrap="square">
+            <a:spAutoFit/>
+          </a:bodyPr>
+          <a:lstStyle/>
+          <a:p>
+            <a:pPr algn="ctr"/>
+            <a:r>
+              <a:rPr sz="2000" b="0" i="0">
+                <a:solidFill>
+                  <a:srgbClr val="828282"/>
+                </a:solidFill>
+                <a:latin typeface="Arial"/>
+              </a:rPr>
+              <a:t>私のために立ち、とりなしてくださる</a:t>
+            </a:r>
+          </a:p>
+        </p:txBody>
+      </p:sp>
+      <p:sp>
+        <p:nvSpPr>
+          <p:cNvPr id="5" name="TextBox 4"/>
+          <p:cNvSpPr txBox="1"/>
+          <p:nvPr/>
+        </p:nvSpPr>
+        <p:spPr>
+          <a:xfrm>
+            <a:off x="640080" y="4494276"/>
+            <a:ext cx="10911535" cy="310896"/>
+          </a:xfrm>
+          <a:prstGeom prst="rect">
+            <a:avLst/>
+          </a:prstGeom>
+          <a:noFill/>
+        </p:spPr>
+        <p:txBody>
+          <a:bodyPr wrap="square">
+            <a:spAutoFit/>
+          </a:bodyPr>
+          <a:lstStyle/>
+          <a:p>
+            <a:pPr algn="ctr"/>
+            <a:r>
+              <a:rPr sz="2000" b="0" i="0">
+                <a:solidFill>
+                  <a:srgbClr val="828282"/>
+                </a:solidFill>
+                <a:latin typeface="Arial"/>
+              </a:rPr>
+              <a:t>私の名は御手に刻まれた</a:t>
+            </a:r>
+          </a:p>
+        </p:txBody>
+      </p:sp>
     </p:spTree>
   </p:cSld>
   <p:clrMapOvr>
@@ -3609,6 +3749,76 @@
           </a:p>
         </p:txBody>
       </p:sp>
+      <p:sp>
+        <p:nvSpPr>
+          <p:cNvPr id="4" name="TextBox 3"/>
+          <p:cNvSpPr txBox="1"/>
+          <p:nvPr/>
+        </p:nvSpPr>
+        <p:spPr>
+          <a:xfrm>
+            <a:off x="640080" y="4128516"/>
+            <a:ext cx="10911535" cy="310896"/>
+          </a:xfrm>
+          <a:prstGeom prst="rect">
+            <a:avLst/>
+          </a:prstGeom>
+          <a:noFill/>
+        </p:spPr>
+        <p:txBody>
+          <a:bodyPr wrap="square">
+            <a:spAutoFit/>
+          </a:bodyPr>
+          <a:lstStyle/>
+          <a:p>
+            <a:pPr algn="ctr"/>
+            <a:r>
+              <a:rPr sz="2000" b="0" i="0">
+                <a:solidFill>
+                  <a:srgbClr val="828282"/>
+                </a:solidFill>
+                <a:latin typeface="Arial"/>
+              </a:rPr>
+              <a:t>私の名は御心に書かれた</a:t>
+            </a:r>
+          </a:p>
+        </p:txBody>
+      </p:sp>
+      <p:sp>
+        <p:nvSpPr>
+          <p:cNvPr id="5" name="TextBox 4"/>
+          <p:cNvSpPr txBox="1"/>
+          <p:nvPr/>
+        </p:nvSpPr>
+        <p:spPr>
+          <a:xfrm>
+            <a:off x="640080" y="4494276"/>
+            <a:ext cx="10911535" cy="310896"/>
+          </a:xfrm>
+          <a:prstGeom prst="rect">
+            <a:avLst/>
+          </a:prstGeom>
+          <a:noFill/>
+        </p:spPr>
+        <p:txBody>
+          <a:bodyPr wrap="square">
+            <a:spAutoFit/>
+          </a:bodyPr>
+          <a:lstStyle/>
+          <a:p>
+            <a:pPr algn="ctr"/>
+            <a:r>
+              <a:rPr sz="2000" b="0" i="0">
+                <a:solidFill>
+                  <a:srgbClr val="828282"/>
+                </a:solidFill>
+                <a:latin typeface="Arial"/>
+              </a:rPr>
+              <a:t>彼が私のために生きている限り</a:t>
+            </a:r>
+          </a:p>
+        </p:txBody>
+      </p:sp>
     </p:spTree>
   </p:cSld>
   <p:clrMapOvr>
@@ -3670,6 +3880,41 @@
           </a:p>
         </p:txBody>
       </p:sp>
+      <p:sp>
+        <p:nvSpPr>
+          <p:cNvPr id="3" name="TextBox 2"/>
+          <p:cNvSpPr txBox="1"/>
+          <p:nvPr/>
+        </p:nvSpPr>
+        <p:spPr>
+          <a:xfrm>
+            <a:off x="640080" y="3845052"/>
+            <a:ext cx="10911535" cy="310896"/>
+          </a:xfrm>
+          <a:prstGeom prst="rect">
+            <a:avLst/>
+          </a:prstGeom>
+          <a:noFill/>
+        </p:spPr>
+        <p:txBody>
+          <a:bodyPr wrap="square">
+            <a:spAutoFit/>
+          </a:bodyPr>
+          <a:lstStyle/>
+          <a:p>
+            <a:pPr algn="ctr"/>
+            <a:r>
+              <a:rPr sz="2000" b="0" i="0">
+                <a:solidFill>
+                  <a:srgbClr val="828282"/>
+                </a:solidFill>
+                <a:latin typeface="Arial"/>
+              </a:rPr>
+              <a:t>永遠に決して死ぬことはない</a:t>
+            </a:r>
+          </a:p>
+        </p:txBody>
+      </p:sp>
     </p:spTree>
   </p:cSld>
   <p:clrMapOvr>
@@ -5702,6 +5947,76 @@
                 <a:latin typeface="Arial"/>
               </a:rPr>
               <a:t>Diante do trono de Deus acima</a:t>
+            </a:r>
+          </a:p>
+        </p:txBody>
+      </p:sp>
+      <p:sp>
+        <p:nvSpPr>
+          <p:cNvPr id="4" name="TextBox 3"/>
+          <p:cNvSpPr txBox="1"/>
+          <p:nvPr/>
+        </p:nvSpPr>
+        <p:spPr>
+          <a:xfrm>
+            <a:off x="640080" y="4128516"/>
+            <a:ext cx="10911535" cy="310896"/>
+          </a:xfrm>
+          <a:prstGeom prst="rect">
+            <a:avLst/>
+          </a:prstGeom>
+          <a:noFill/>
+        </p:spPr>
+        <p:txBody>
+          <a:bodyPr wrap="square">
+            <a:spAutoFit/>
+          </a:bodyPr>
+          <a:lstStyle/>
+          <a:p>
+            <a:pPr algn="ctr"/>
+            <a:r>
+              <a:rPr sz="2000" b="0" i="0">
+                <a:solidFill>
+                  <a:srgbClr val="828282"/>
+                </a:solidFill>
+                <a:latin typeface="Arial"/>
+              </a:rPr>
+              <a:t>神の玉座の前に</a:t>
+            </a:r>
+          </a:p>
+        </p:txBody>
+      </p:sp>
+      <p:sp>
+        <p:nvSpPr>
+          <p:cNvPr id="5" name="TextBox 4"/>
+          <p:cNvSpPr txBox="1"/>
+          <p:nvPr/>
+        </p:nvSpPr>
+        <p:spPr>
+          <a:xfrm>
+            <a:off x="640080" y="4494276"/>
+            <a:ext cx="10911535" cy="310896"/>
+          </a:xfrm>
+          <a:prstGeom prst="rect">
+            <a:avLst/>
+          </a:prstGeom>
+          <a:noFill/>
+        </p:spPr>
+        <p:txBody>
+          <a:bodyPr wrap="square">
+            <a:spAutoFit/>
+          </a:bodyPr>
+          <a:lstStyle/>
+          <a:p>
+            <a:pPr algn="ctr"/>
+            <a:r>
+              <a:rPr sz="2000" b="0" i="0">
+                <a:solidFill>
+                  <a:srgbClr val="828282"/>
+                </a:solidFill>
+                <a:latin typeface="Arial"/>
+              </a:rPr>
+              <a:t>神の玉座の前に、上に</a:t>
             </a:r>
           </a:p>
         </p:txBody>
